--- a/Slides/Standards/Pose_Standards_01.pptx
+++ b/Slides/Standards/Pose_Standards_01.pptx
@@ -7906,7 +7906,7 @@
                 <a:cs typeface="Calibri"/>
                 <a:sym typeface="Calibri"/>
               </a:rPr>
-              <a:t>Pose Representation</a:t>
+              <a:t>Pose Standards</a:t>
             </a:r>
             <a:endParaRPr sz="8600" dirty="0">
               <a:latin typeface="Calibri"/>
@@ -7959,7 +7959,7 @@
                 <a:cs typeface="Calibri"/>
                 <a:sym typeface="Calibri"/>
               </a:rPr>
-              <a:t>Formalisms for the three Pose types and their decorations.</a:t>
+              <a:t>Standards enable communication of Pose.</a:t>
             </a:r>
             <a:endParaRPr sz="2060" dirty="0">
               <a:latin typeface="Calibri"/>
@@ -8098,13 +8098,22 @@
               <a:buNone/>
             </a:pPr>
             <a:r>
+              <a:rPr lang="en-US" dirty="0">
+                <a:latin typeface="Calibri"/>
+                <a:ea typeface="Calibri"/>
+                <a:cs typeface="Calibri"/>
+                <a:sym typeface="Calibri"/>
+              </a:rPr>
+              <a:t>Standards</a:t>
+            </a:r>
+            <a:r>
               <a:rPr lang="en" dirty="0">
                 <a:latin typeface="Calibri"/>
                 <a:ea typeface="Calibri"/>
                 <a:cs typeface="Calibri"/>
                 <a:sym typeface="Calibri"/>
               </a:rPr>
-              <a:t>Representation-01</a:t>
+              <a:t>-01</a:t>
             </a:r>
             <a:endParaRPr dirty="0">
               <a:latin typeface="Calibri"/>
@@ -8217,13 +8226,22 @@
               <a:buNone/>
             </a:pPr>
             <a:r>
+              <a:rPr lang="en-US" dirty="0">
+                <a:latin typeface="Calibri"/>
+                <a:ea typeface="Calibri"/>
+                <a:cs typeface="Calibri"/>
+                <a:sym typeface="Calibri"/>
+              </a:rPr>
+              <a:t>Standards</a:t>
+            </a:r>
+            <a:r>
               <a:rPr lang="en" dirty="0">
                 <a:latin typeface="Calibri"/>
                 <a:ea typeface="Calibri"/>
                 <a:cs typeface="Calibri"/>
                 <a:sym typeface="Calibri"/>
               </a:rPr>
-              <a:t>Representation-01</a:t>
+              <a:t>-01</a:t>
             </a:r>
             <a:endParaRPr dirty="0">
               <a:latin typeface="Calibri"/>
@@ -8336,13 +8354,22 @@
               <a:buNone/>
             </a:pPr>
             <a:r>
+              <a:rPr lang="en-US" dirty="0">
+                <a:latin typeface="Calibri"/>
+                <a:ea typeface="Calibri"/>
+                <a:cs typeface="Calibri"/>
+                <a:sym typeface="Calibri"/>
+              </a:rPr>
+              <a:t>Standards</a:t>
+            </a:r>
+            <a:r>
               <a:rPr lang="en" dirty="0">
                 <a:latin typeface="Calibri"/>
                 <a:ea typeface="Calibri"/>
                 <a:cs typeface="Calibri"/>
                 <a:sym typeface="Calibri"/>
               </a:rPr>
-              <a:t>Representation-01</a:t>
+              <a:t>-01</a:t>
             </a:r>
             <a:endParaRPr dirty="0">
               <a:latin typeface="Calibri"/>
@@ -8455,13 +8482,22 @@
               <a:buNone/>
             </a:pPr>
             <a:r>
+              <a:rPr lang="en-US" dirty="0">
+                <a:latin typeface="Calibri"/>
+                <a:ea typeface="Calibri"/>
+                <a:cs typeface="Calibri"/>
+                <a:sym typeface="Calibri"/>
+              </a:rPr>
+              <a:t>Standards</a:t>
+            </a:r>
+            <a:r>
               <a:rPr lang="en" dirty="0">
                 <a:latin typeface="Calibri"/>
                 <a:ea typeface="Calibri"/>
                 <a:cs typeface="Calibri"/>
                 <a:sym typeface="Calibri"/>
               </a:rPr>
-              <a:t>Representation-01</a:t>
+              <a:t>-01</a:t>
             </a:r>
             <a:endParaRPr dirty="0">
               <a:latin typeface="Calibri"/>
@@ -8574,13 +8610,22 @@
               <a:buNone/>
             </a:pPr>
             <a:r>
+              <a:rPr lang="en-US" dirty="0">
+                <a:latin typeface="Calibri"/>
+                <a:ea typeface="Calibri"/>
+                <a:cs typeface="Calibri"/>
+                <a:sym typeface="Calibri"/>
+              </a:rPr>
+              <a:t>Standards</a:t>
+            </a:r>
+            <a:r>
               <a:rPr lang="en" dirty="0">
                 <a:latin typeface="Calibri"/>
                 <a:ea typeface="Calibri"/>
                 <a:cs typeface="Calibri"/>
                 <a:sym typeface="Calibri"/>
               </a:rPr>
-              <a:t>Representation-01</a:t>
+              <a:t>-01</a:t>
             </a:r>
             <a:endParaRPr dirty="0">
               <a:latin typeface="Calibri"/>
@@ -8693,13 +8738,22 @@
               <a:buNone/>
             </a:pPr>
             <a:r>
+              <a:rPr lang="en-US" dirty="0">
+                <a:latin typeface="Calibri"/>
+                <a:ea typeface="Calibri"/>
+                <a:cs typeface="Calibri"/>
+                <a:sym typeface="Calibri"/>
+              </a:rPr>
+              <a:t>Standards</a:t>
+            </a:r>
+            <a:r>
               <a:rPr lang="en" dirty="0">
                 <a:latin typeface="Calibri"/>
                 <a:ea typeface="Calibri"/>
                 <a:cs typeface="Calibri"/>
                 <a:sym typeface="Calibri"/>
               </a:rPr>
-              <a:t>Representation-01</a:t>
+              <a:t>-01</a:t>
             </a:r>
             <a:endParaRPr dirty="0">
               <a:latin typeface="Calibri"/>
@@ -8812,13 +8866,22 @@
               <a:buNone/>
             </a:pPr>
             <a:r>
+              <a:rPr lang="en-US" dirty="0">
+                <a:latin typeface="Calibri"/>
+                <a:ea typeface="Calibri"/>
+                <a:cs typeface="Calibri"/>
+                <a:sym typeface="Calibri"/>
+              </a:rPr>
+              <a:t>Standards</a:t>
+            </a:r>
+            <a:r>
               <a:rPr lang="en" dirty="0">
                 <a:latin typeface="Calibri"/>
                 <a:ea typeface="Calibri"/>
                 <a:cs typeface="Calibri"/>
                 <a:sym typeface="Calibri"/>
               </a:rPr>
-              <a:t>Representation-01</a:t>
+              <a:t>-01</a:t>
             </a:r>
             <a:endParaRPr dirty="0">
               <a:latin typeface="Calibri"/>
@@ -8931,13 +8994,22 @@
               <a:buNone/>
             </a:pPr>
             <a:r>
+              <a:rPr lang="en-US" dirty="0">
+                <a:latin typeface="Calibri"/>
+                <a:ea typeface="Calibri"/>
+                <a:cs typeface="Calibri"/>
+                <a:sym typeface="Calibri"/>
+              </a:rPr>
+              <a:t>Standards</a:t>
+            </a:r>
+            <a:r>
               <a:rPr lang="en" dirty="0">
                 <a:latin typeface="Calibri"/>
                 <a:ea typeface="Calibri"/>
                 <a:cs typeface="Calibri"/>
                 <a:sym typeface="Calibri"/>
               </a:rPr>
-              <a:t>Representation-01</a:t>
+              <a:t>-01</a:t>
             </a:r>
             <a:endParaRPr dirty="0">
               <a:latin typeface="Calibri"/>
@@ -9198,7 +9270,7 @@
                 <a:cs typeface="Calibri"/>
                 <a:sym typeface="Calibri"/>
               </a:rPr>
-              <a:t>Representation-01</a:t>
+              <a:t>Standards-01</a:t>
             </a:r>
             <a:endParaRPr dirty="0">
               <a:latin typeface="Calibri"/>
@@ -9227,10 +9299,55 @@
         </p:nvSpPr>
         <p:spPr/>
         <p:txBody>
-          <a:bodyPr/>
+          <a:bodyPr>
+            <a:normAutofit fontScale="25000" lnSpcReduction="20000"/>
+          </a:bodyPr>
           <a:lstStyle/>
           <a:p>
-            <a:endParaRPr lang="en-US"/>
+            <a:r>
+              <a:rPr lang="en-US" dirty="0"/>
+              <a:t>Standards enable communication.</a:t>
+            </a:r>
+          </a:p>
+          <a:p>
+            <a:r>
+              <a:rPr lang="en-US" dirty="0"/>
+              <a:t>Both concepts and expressions of Pose content can be standardized.</a:t>
+            </a:r>
+          </a:p>
+          <a:p>
+            <a:r>
+              <a:rPr lang="en-US" dirty="0"/>
+              <a:t>Standardization of concepts extends beyond a single domain,</a:t>
+            </a:r>
+          </a:p>
+          <a:p>
+            <a:r>
+              <a:rPr lang="en-US" dirty="0"/>
+              <a:t>Stardardization of data elements – data types and classes – enables interoperation</a:t>
+            </a:r>
+          </a:p>
+          <a:p>
+            <a:r>
+              <a:rPr lang="en-US" dirty="0"/>
+              <a:t>Primitive data types</a:t>
+            </a:r>
+          </a:p>
+          <a:p>
+            <a:r>
+              <a:rPr lang="en-US" dirty="0" err="1"/>
+              <a:t>Semanticized</a:t>
+            </a:r>
+            <a:r>
+              <a:rPr lang="en-US" dirty="0"/>
+              <a:t> data types</a:t>
+            </a:r>
+          </a:p>
+          <a:p>
+            <a:r>
+              <a:rPr lang="en-US" dirty="0"/>
+              <a:t>Classes </a:t>
+            </a:r>
           </a:p>
         </p:txBody>
       </p:sp>
@@ -9306,13 +9423,22 @@
               <a:buNone/>
             </a:pPr>
             <a:r>
+              <a:rPr lang="en-US" dirty="0">
+                <a:latin typeface="Calibri"/>
+                <a:ea typeface="Calibri"/>
+                <a:cs typeface="Calibri"/>
+                <a:sym typeface="Calibri"/>
+              </a:rPr>
+              <a:t>Standards</a:t>
+            </a:r>
+            <a:r>
               <a:rPr lang="en" dirty="0">
                 <a:latin typeface="Calibri"/>
                 <a:ea typeface="Calibri"/>
                 <a:cs typeface="Calibri"/>
                 <a:sym typeface="Calibri"/>
               </a:rPr>
-              <a:t>Representation-01</a:t>
+              <a:t>-01</a:t>
             </a:r>
             <a:endParaRPr dirty="0">
               <a:latin typeface="Calibri"/>
@@ -9425,13 +9551,22 @@
               <a:buNone/>
             </a:pPr>
             <a:r>
+              <a:rPr lang="en-US" dirty="0">
+                <a:latin typeface="Calibri"/>
+                <a:ea typeface="Calibri"/>
+                <a:cs typeface="Calibri"/>
+                <a:sym typeface="Calibri"/>
+              </a:rPr>
+              <a:t>Standards</a:t>
+            </a:r>
+            <a:r>
               <a:rPr lang="en" dirty="0">
                 <a:latin typeface="Calibri"/>
                 <a:ea typeface="Calibri"/>
                 <a:cs typeface="Calibri"/>
                 <a:sym typeface="Calibri"/>
               </a:rPr>
-              <a:t>Representation-01</a:t>
+              <a:t>-01</a:t>
             </a:r>
             <a:endParaRPr dirty="0">
               <a:latin typeface="Calibri"/>
@@ -9544,13 +9679,22 @@
               <a:buNone/>
             </a:pPr>
             <a:r>
+              <a:rPr lang="en-US" dirty="0">
+                <a:latin typeface="Calibri"/>
+                <a:ea typeface="Calibri"/>
+                <a:cs typeface="Calibri"/>
+                <a:sym typeface="Calibri"/>
+              </a:rPr>
+              <a:t>Standards</a:t>
+            </a:r>
+            <a:r>
               <a:rPr lang="en" dirty="0">
                 <a:latin typeface="Calibri"/>
                 <a:ea typeface="Calibri"/>
                 <a:cs typeface="Calibri"/>
                 <a:sym typeface="Calibri"/>
               </a:rPr>
-              <a:t>Representation-01</a:t>
+              <a:t>-01</a:t>
             </a:r>
             <a:endParaRPr dirty="0">
               <a:latin typeface="Calibri"/>
@@ -9663,13 +9807,22 @@
               <a:buNone/>
             </a:pPr>
             <a:r>
+              <a:rPr lang="en-US" dirty="0">
+                <a:latin typeface="Calibri"/>
+                <a:ea typeface="Calibri"/>
+                <a:cs typeface="Calibri"/>
+                <a:sym typeface="Calibri"/>
+              </a:rPr>
+              <a:t>Standards</a:t>
+            </a:r>
+            <a:r>
               <a:rPr lang="en" dirty="0">
                 <a:latin typeface="Calibri"/>
                 <a:ea typeface="Calibri"/>
                 <a:cs typeface="Calibri"/>
                 <a:sym typeface="Calibri"/>
               </a:rPr>
-              <a:t>Representation-01</a:t>
+              <a:t>-01</a:t>
             </a:r>
             <a:endParaRPr dirty="0">
               <a:latin typeface="Calibri"/>
@@ -9782,13 +9935,22 @@
               <a:buNone/>
             </a:pPr>
             <a:r>
+              <a:rPr lang="en-US" dirty="0">
+                <a:latin typeface="Calibri"/>
+                <a:ea typeface="Calibri"/>
+                <a:cs typeface="Calibri"/>
+                <a:sym typeface="Calibri"/>
+              </a:rPr>
+              <a:t>Standards</a:t>
+            </a:r>
+            <a:r>
               <a:rPr lang="en" dirty="0">
                 <a:latin typeface="Calibri"/>
                 <a:ea typeface="Calibri"/>
                 <a:cs typeface="Calibri"/>
                 <a:sym typeface="Calibri"/>
               </a:rPr>
-              <a:t>Representation-01</a:t>
+              <a:t>-01</a:t>
             </a:r>
             <a:endParaRPr dirty="0">
               <a:latin typeface="Calibri"/>
@@ -9901,13 +10063,22 @@
               <a:buNone/>
             </a:pPr>
             <a:r>
+              <a:rPr lang="en-US" dirty="0">
+                <a:latin typeface="Calibri"/>
+                <a:ea typeface="Calibri"/>
+                <a:cs typeface="Calibri"/>
+                <a:sym typeface="Calibri"/>
+              </a:rPr>
+              <a:t>Standards</a:t>
+            </a:r>
+            <a:r>
               <a:rPr lang="en" dirty="0">
                 <a:latin typeface="Calibri"/>
                 <a:ea typeface="Calibri"/>
                 <a:cs typeface="Calibri"/>
                 <a:sym typeface="Calibri"/>
               </a:rPr>
-              <a:t>Representation-01</a:t>
+              <a:t>-01</a:t>
             </a:r>
             <a:endParaRPr dirty="0">
               <a:latin typeface="Calibri"/>

--- a/Slides/Standards/Pose_Standards_01.pptx
+++ b/Slides/Standards/Pose_Standards_01.pptx
@@ -5,7 +5,7 @@
     <p:sldMasterId id="2147483659" r:id="rId1"/>
   </p:sldMasterIdLst>
   <p:notesMasterIdLst>
-    <p:notesMasterId r:id="rId20"/>
+    <p:notesMasterId r:id="rId21"/>
   </p:notesMasterIdLst>
   <p:sldIdLst>
     <p:sldId id="256" r:id="rId2"/>
@@ -13,19 +13,20 @@
     <p:sldId id="258" r:id="rId4"/>
     <p:sldId id="279" r:id="rId5"/>
     <p:sldId id="280" r:id="rId6"/>
-    <p:sldId id="281" r:id="rId7"/>
-    <p:sldId id="282" r:id="rId8"/>
-    <p:sldId id="283" r:id="rId9"/>
-    <p:sldId id="284" r:id="rId10"/>
-    <p:sldId id="285" r:id="rId11"/>
-    <p:sldId id="286" r:id="rId12"/>
-    <p:sldId id="287" r:id="rId13"/>
-    <p:sldId id="288" r:id="rId14"/>
-    <p:sldId id="289" r:id="rId15"/>
-    <p:sldId id="290" r:id="rId16"/>
-    <p:sldId id="291" r:id="rId17"/>
-    <p:sldId id="292" r:id="rId18"/>
-    <p:sldId id="273" r:id="rId19"/>
+    <p:sldId id="293" r:id="rId7"/>
+    <p:sldId id="281" r:id="rId8"/>
+    <p:sldId id="282" r:id="rId9"/>
+    <p:sldId id="283" r:id="rId10"/>
+    <p:sldId id="284" r:id="rId11"/>
+    <p:sldId id="285" r:id="rId12"/>
+    <p:sldId id="286" r:id="rId13"/>
+    <p:sldId id="287" r:id="rId14"/>
+    <p:sldId id="288" r:id="rId15"/>
+    <p:sldId id="289" r:id="rId16"/>
+    <p:sldId id="290" r:id="rId17"/>
+    <p:sldId id="291" r:id="rId18"/>
+    <p:sldId id="292" r:id="rId19"/>
+    <p:sldId id="273" r:id="rId20"/>
   </p:sldIdLst>
   <p:sldSz cx="9144000" cy="5143500" type="screen16x9"/>
   <p:notesSz cx="6858000" cy="9144000"/>
@@ -840,7 +841,7 @@
         <p:cNvPr id="1" name="Shape 71">
           <a:extLst>
             <a:ext uri="{FF2B5EF4-FFF2-40B4-BE49-F238E27FC236}">
-              <a16:creationId xmlns:a16="http://schemas.microsoft.com/office/drawing/2014/main" id="{BDCE1739-9653-8250-2A24-397D3ADB7960}"/>
+              <a16:creationId xmlns:a16="http://schemas.microsoft.com/office/drawing/2014/main" id="{7840ED41-044F-6EE6-399D-7C8AF37D6706}"/>
             </a:ext>
           </a:extLst>
         </p:cNvPr>
@@ -860,7 +861,7 @@
           <p:cNvPr id="72" name="Google Shape;72;g37ec9a311ae_0_1:notes">
             <a:extLst>
               <a:ext uri="{FF2B5EF4-FFF2-40B4-BE49-F238E27FC236}">
-                <a16:creationId xmlns:a16="http://schemas.microsoft.com/office/drawing/2014/main" id="{A68011BE-4349-D7B0-9AF4-3851A9F72C4E}"/>
+                <a16:creationId xmlns:a16="http://schemas.microsoft.com/office/drawing/2014/main" id="{9C1A1729-1454-4017-525D-606B70CE5CE8}"/>
               </a:ext>
             </a:extLst>
           </p:cNvPr>
@@ -907,7 +908,7 @@
           <p:cNvPr id="73" name="Google Shape;73;g37ec9a311ae_0_1:notes">
             <a:extLst>
               <a:ext uri="{FF2B5EF4-FFF2-40B4-BE49-F238E27FC236}">
-                <a16:creationId xmlns:a16="http://schemas.microsoft.com/office/drawing/2014/main" id="{269AEE0D-2C40-6DD3-AC46-2DBEAE650E58}"/>
+                <a16:creationId xmlns:a16="http://schemas.microsoft.com/office/drawing/2014/main" id="{034EBF85-E636-C675-74DC-F46AC10A0828}"/>
               </a:ext>
             </a:extLst>
           </p:cNvPr>
@@ -949,7 +950,7 @@
     </p:spTree>
     <p:extLst>
       <p:ext uri="{BB962C8B-B14F-4D97-AF65-F5344CB8AC3E}">
-        <p14:creationId xmlns:p14="http://schemas.microsoft.com/office/powerpoint/2010/main" val="87335572"/>
+        <p14:creationId xmlns:p14="http://schemas.microsoft.com/office/powerpoint/2010/main" val="3331348892"/>
       </p:ext>
     </p:extLst>
   </p:cSld>
@@ -967,7 +968,7 @@
         <p:cNvPr id="1" name="Shape 71">
           <a:extLst>
             <a:ext uri="{FF2B5EF4-FFF2-40B4-BE49-F238E27FC236}">
-              <a16:creationId xmlns:a16="http://schemas.microsoft.com/office/drawing/2014/main" id="{86526504-6C0B-1A6B-0CC1-E1E8E67B9A30}"/>
+              <a16:creationId xmlns:a16="http://schemas.microsoft.com/office/drawing/2014/main" id="{BDCE1739-9653-8250-2A24-397D3ADB7960}"/>
             </a:ext>
           </a:extLst>
         </p:cNvPr>
@@ -987,7 +988,7 @@
           <p:cNvPr id="72" name="Google Shape;72;g37ec9a311ae_0_1:notes">
             <a:extLst>
               <a:ext uri="{FF2B5EF4-FFF2-40B4-BE49-F238E27FC236}">
-                <a16:creationId xmlns:a16="http://schemas.microsoft.com/office/drawing/2014/main" id="{7A9F0FED-A81B-2C8D-CF99-60D9E3BC6F86}"/>
+                <a16:creationId xmlns:a16="http://schemas.microsoft.com/office/drawing/2014/main" id="{A68011BE-4349-D7B0-9AF4-3851A9F72C4E}"/>
               </a:ext>
             </a:extLst>
           </p:cNvPr>
@@ -1034,7 +1035,7 @@
           <p:cNvPr id="73" name="Google Shape;73;g37ec9a311ae_0_1:notes">
             <a:extLst>
               <a:ext uri="{FF2B5EF4-FFF2-40B4-BE49-F238E27FC236}">
-                <a16:creationId xmlns:a16="http://schemas.microsoft.com/office/drawing/2014/main" id="{30EE6B07-0D40-5996-576E-8D64482C4417}"/>
+                <a16:creationId xmlns:a16="http://schemas.microsoft.com/office/drawing/2014/main" id="{269AEE0D-2C40-6DD3-AC46-2DBEAE650E58}"/>
               </a:ext>
             </a:extLst>
           </p:cNvPr>
@@ -1076,7 +1077,7 @@
     </p:spTree>
     <p:extLst>
       <p:ext uri="{BB962C8B-B14F-4D97-AF65-F5344CB8AC3E}">
-        <p14:creationId xmlns:p14="http://schemas.microsoft.com/office/powerpoint/2010/main" val="673728250"/>
+        <p14:creationId xmlns:p14="http://schemas.microsoft.com/office/powerpoint/2010/main" val="87335572"/>
       </p:ext>
     </p:extLst>
   </p:cSld>
@@ -1094,7 +1095,7 @@
         <p:cNvPr id="1" name="Shape 71">
           <a:extLst>
             <a:ext uri="{FF2B5EF4-FFF2-40B4-BE49-F238E27FC236}">
-              <a16:creationId xmlns:a16="http://schemas.microsoft.com/office/drawing/2014/main" id="{4E95098B-B9D5-B14D-C94C-465A40D0F6A9}"/>
+              <a16:creationId xmlns:a16="http://schemas.microsoft.com/office/drawing/2014/main" id="{86526504-6C0B-1A6B-0CC1-E1E8E67B9A30}"/>
             </a:ext>
           </a:extLst>
         </p:cNvPr>
@@ -1114,7 +1115,7 @@
           <p:cNvPr id="72" name="Google Shape;72;g37ec9a311ae_0_1:notes">
             <a:extLst>
               <a:ext uri="{FF2B5EF4-FFF2-40B4-BE49-F238E27FC236}">
-                <a16:creationId xmlns:a16="http://schemas.microsoft.com/office/drawing/2014/main" id="{F4967BC0-118C-F3C4-DBDD-CC45EF516E90}"/>
+                <a16:creationId xmlns:a16="http://schemas.microsoft.com/office/drawing/2014/main" id="{7A9F0FED-A81B-2C8D-CF99-60D9E3BC6F86}"/>
               </a:ext>
             </a:extLst>
           </p:cNvPr>
@@ -1161,7 +1162,7 @@
           <p:cNvPr id="73" name="Google Shape;73;g37ec9a311ae_0_1:notes">
             <a:extLst>
               <a:ext uri="{FF2B5EF4-FFF2-40B4-BE49-F238E27FC236}">
-                <a16:creationId xmlns:a16="http://schemas.microsoft.com/office/drawing/2014/main" id="{A93FC131-2416-1E5B-F596-8F1A88421EE9}"/>
+                <a16:creationId xmlns:a16="http://schemas.microsoft.com/office/drawing/2014/main" id="{30EE6B07-0D40-5996-576E-8D64482C4417}"/>
               </a:ext>
             </a:extLst>
           </p:cNvPr>
@@ -1203,7 +1204,7 @@
     </p:spTree>
     <p:extLst>
       <p:ext uri="{BB962C8B-B14F-4D97-AF65-F5344CB8AC3E}">
-        <p14:creationId xmlns:p14="http://schemas.microsoft.com/office/powerpoint/2010/main" val="2911067318"/>
+        <p14:creationId xmlns:p14="http://schemas.microsoft.com/office/powerpoint/2010/main" val="673728250"/>
       </p:ext>
     </p:extLst>
   </p:cSld>
@@ -1221,7 +1222,7 @@
         <p:cNvPr id="1" name="Shape 71">
           <a:extLst>
             <a:ext uri="{FF2B5EF4-FFF2-40B4-BE49-F238E27FC236}">
-              <a16:creationId xmlns:a16="http://schemas.microsoft.com/office/drawing/2014/main" id="{0BF4B1F7-A620-1242-EC45-6FA2FA85E405}"/>
+              <a16:creationId xmlns:a16="http://schemas.microsoft.com/office/drawing/2014/main" id="{4E95098B-B9D5-B14D-C94C-465A40D0F6A9}"/>
             </a:ext>
           </a:extLst>
         </p:cNvPr>
@@ -1241,7 +1242,7 @@
           <p:cNvPr id="72" name="Google Shape;72;g37ec9a311ae_0_1:notes">
             <a:extLst>
               <a:ext uri="{FF2B5EF4-FFF2-40B4-BE49-F238E27FC236}">
-                <a16:creationId xmlns:a16="http://schemas.microsoft.com/office/drawing/2014/main" id="{30405940-5405-4A21-9C84-7BED093AD0BE}"/>
+                <a16:creationId xmlns:a16="http://schemas.microsoft.com/office/drawing/2014/main" id="{F4967BC0-118C-F3C4-DBDD-CC45EF516E90}"/>
               </a:ext>
             </a:extLst>
           </p:cNvPr>
@@ -1288,7 +1289,7 @@
           <p:cNvPr id="73" name="Google Shape;73;g37ec9a311ae_0_1:notes">
             <a:extLst>
               <a:ext uri="{FF2B5EF4-FFF2-40B4-BE49-F238E27FC236}">
-                <a16:creationId xmlns:a16="http://schemas.microsoft.com/office/drawing/2014/main" id="{6B81C502-6BED-75C8-4130-43E507FE3865}"/>
+                <a16:creationId xmlns:a16="http://schemas.microsoft.com/office/drawing/2014/main" id="{A93FC131-2416-1E5B-F596-8F1A88421EE9}"/>
               </a:ext>
             </a:extLst>
           </p:cNvPr>
@@ -1330,7 +1331,7 @@
     </p:spTree>
     <p:extLst>
       <p:ext uri="{BB962C8B-B14F-4D97-AF65-F5344CB8AC3E}">
-        <p14:creationId xmlns:p14="http://schemas.microsoft.com/office/powerpoint/2010/main" val="124403326"/>
+        <p14:creationId xmlns:p14="http://schemas.microsoft.com/office/powerpoint/2010/main" val="2911067318"/>
       </p:ext>
     </p:extLst>
   </p:cSld>
@@ -1348,7 +1349,7 @@
         <p:cNvPr id="1" name="Shape 71">
           <a:extLst>
             <a:ext uri="{FF2B5EF4-FFF2-40B4-BE49-F238E27FC236}">
-              <a16:creationId xmlns:a16="http://schemas.microsoft.com/office/drawing/2014/main" id="{9B25BC46-13D0-A8ED-FBE8-3095EFB04196}"/>
+              <a16:creationId xmlns:a16="http://schemas.microsoft.com/office/drawing/2014/main" id="{0BF4B1F7-A620-1242-EC45-6FA2FA85E405}"/>
             </a:ext>
           </a:extLst>
         </p:cNvPr>
@@ -1368,7 +1369,7 @@
           <p:cNvPr id="72" name="Google Shape;72;g37ec9a311ae_0_1:notes">
             <a:extLst>
               <a:ext uri="{FF2B5EF4-FFF2-40B4-BE49-F238E27FC236}">
-                <a16:creationId xmlns:a16="http://schemas.microsoft.com/office/drawing/2014/main" id="{5DED8D5D-C0FB-546F-6770-405982816A7C}"/>
+                <a16:creationId xmlns:a16="http://schemas.microsoft.com/office/drawing/2014/main" id="{30405940-5405-4A21-9C84-7BED093AD0BE}"/>
               </a:ext>
             </a:extLst>
           </p:cNvPr>
@@ -1415,7 +1416,7 @@
           <p:cNvPr id="73" name="Google Shape;73;g37ec9a311ae_0_1:notes">
             <a:extLst>
               <a:ext uri="{FF2B5EF4-FFF2-40B4-BE49-F238E27FC236}">
-                <a16:creationId xmlns:a16="http://schemas.microsoft.com/office/drawing/2014/main" id="{4E33221A-33EB-12D5-A568-9A8299490C54}"/>
+                <a16:creationId xmlns:a16="http://schemas.microsoft.com/office/drawing/2014/main" id="{6B81C502-6BED-75C8-4130-43E507FE3865}"/>
               </a:ext>
             </a:extLst>
           </p:cNvPr>
@@ -1457,7 +1458,7 @@
     </p:spTree>
     <p:extLst>
       <p:ext uri="{BB962C8B-B14F-4D97-AF65-F5344CB8AC3E}">
-        <p14:creationId xmlns:p14="http://schemas.microsoft.com/office/powerpoint/2010/main" val="3522974483"/>
+        <p14:creationId xmlns:p14="http://schemas.microsoft.com/office/powerpoint/2010/main" val="124403326"/>
       </p:ext>
     </p:extLst>
   </p:cSld>
@@ -1475,7 +1476,7 @@
         <p:cNvPr id="1" name="Shape 71">
           <a:extLst>
             <a:ext uri="{FF2B5EF4-FFF2-40B4-BE49-F238E27FC236}">
-              <a16:creationId xmlns:a16="http://schemas.microsoft.com/office/drawing/2014/main" id="{1DD4F1AE-F5DF-4DC3-AD7E-0599F81ADF01}"/>
+              <a16:creationId xmlns:a16="http://schemas.microsoft.com/office/drawing/2014/main" id="{9B25BC46-13D0-A8ED-FBE8-3095EFB04196}"/>
             </a:ext>
           </a:extLst>
         </p:cNvPr>
@@ -1495,7 +1496,7 @@
           <p:cNvPr id="72" name="Google Shape;72;g37ec9a311ae_0_1:notes">
             <a:extLst>
               <a:ext uri="{FF2B5EF4-FFF2-40B4-BE49-F238E27FC236}">
-                <a16:creationId xmlns:a16="http://schemas.microsoft.com/office/drawing/2014/main" id="{A6AF2AB6-C181-1661-B16F-E7275FFFD728}"/>
+                <a16:creationId xmlns:a16="http://schemas.microsoft.com/office/drawing/2014/main" id="{5DED8D5D-C0FB-546F-6770-405982816A7C}"/>
               </a:ext>
             </a:extLst>
           </p:cNvPr>
@@ -1542,7 +1543,7 @@
           <p:cNvPr id="73" name="Google Shape;73;g37ec9a311ae_0_1:notes">
             <a:extLst>
               <a:ext uri="{FF2B5EF4-FFF2-40B4-BE49-F238E27FC236}">
-                <a16:creationId xmlns:a16="http://schemas.microsoft.com/office/drawing/2014/main" id="{6595FB98-56ED-9BA1-9306-4966AA6C5CA9}"/>
+                <a16:creationId xmlns:a16="http://schemas.microsoft.com/office/drawing/2014/main" id="{4E33221A-33EB-12D5-A568-9A8299490C54}"/>
               </a:ext>
             </a:extLst>
           </p:cNvPr>
@@ -1584,7 +1585,7 @@
     </p:spTree>
     <p:extLst>
       <p:ext uri="{BB962C8B-B14F-4D97-AF65-F5344CB8AC3E}">
-        <p14:creationId xmlns:p14="http://schemas.microsoft.com/office/powerpoint/2010/main" val="2834198955"/>
+        <p14:creationId xmlns:p14="http://schemas.microsoft.com/office/powerpoint/2010/main" val="3522974483"/>
       </p:ext>
     </p:extLst>
   </p:cSld>
@@ -1602,7 +1603,7 @@
         <p:cNvPr id="1" name="Shape 71">
           <a:extLst>
             <a:ext uri="{FF2B5EF4-FFF2-40B4-BE49-F238E27FC236}">
-              <a16:creationId xmlns:a16="http://schemas.microsoft.com/office/drawing/2014/main" id="{195AD6C4-2033-3EA7-A25A-8F004F2813E9}"/>
+              <a16:creationId xmlns:a16="http://schemas.microsoft.com/office/drawing/2014/main" id="{1DD4F1AE-F5DF-4DC3-AD7E-0599F81ADF01}"/>
             </a:ext>
           </a:extLst>
         </p:cNvPr>
@@ -1622,7 +1623,7 @@
           <p:cNvPr id="72" name="Google Shape;72;g37ec9a311ae_0_1:notes">
             <a:extLst>
               <a:ext uri="{FF2B5EF4-FFF2-40B4-BE49-F238E27FC236}">
-                <a16:creationId xmlns:a16="http://schemas.microsoft.com/office/drawing/2014/main" id="{E09BF039-3F68-C729-6F76-EC6C830B8D9C}"/>
+                <a16:creationId xmlns:a16="http://schemas.microsoft.com/office/drawing/2014/main" id="{A6AF2AB6-C181-1661-B16F-E7275FFFD728}"/>
               </a:ext>
             </a:extLst>
           </p:cNvPr>
@@ -1669,7 +1670,7 @@
           <p:cNvPr id="73" name="Google Shape;73;g37ec9a311ae_0_1:notes">
             <a:extLst>
               <a:ext uri="{FF2B5EF4-FFF2-40B4-BE49-F238E27FC236}">
-                <a16:creationId xmlns:a16="http://schemas.microsoft.com/office/drawing/2014/main" id="{93441911-7EB3-2B61-DB0A-31B940B77F28}"/>
+                <a16:creationId xmlns:a16="http://schemas.microsoft.com/office/drawing/2014/main" id="{6595FB98-56ED-9BA1-9306-4966AA6C5CA9}"/>
               </a:ext>
             </a:extLst>
           </p:cNvPr>
@@ -1711,7 +1712,7 @@
     </p:spTree>
     <p:extLst>
       <p:ext uri="{BB962C8B-B14F-4D97-AF65-F5344CB8AC3E}">
-        <p14:creationId xmlns:p14="http://schemas.microsoft.com/office/powerpoint/2010/main" val="3961964625"/>
+        <p14:creationId xmlns:p14="http://schemas.microsoft.com/office/powerpoint/2010/main" val="2834198955"/>
       </p:ext>
     </p:extLst>
   </p:cSld>
@@ -1729,7 +1730,7 @@
         <p:cNvPr id="1" name="Shape 71">
           <a:extLst>
             <a:ext uri="{FF2B5EF4-FFF2-40B4-BE49-F238E27FC236}">
-              <a16:creationId xmlns:a16="http://schemas.microsoft.com/office/drawing/2014/main" id="{335A3E43-DD13-9D35-4957-4EEF593CDAF4}"/>
+              <a16:creationId xmlns:a16="http://schemas.microsoft.com/office/drawing/2014/main" id="{195AD6C4-2033-3EA7-A25A-8F004F2813E9}"/>
             </a:ext>
           </a:extLst>
         </p:cNvPr>
@@ -1749,7 +1750,7 @@
           <p:cNvPr id="72" name="Google Shape;72;g37ec9a311ae_0_1:notes">
             <a:extLst>
               <a:ext uri="{FF2B5EF4-FFF2-40B4-BE49-F238E27FC236}">
-                <a16:creationId xmlns:a16="http://schemas.microsoft.com/office/drawing/2014/main" id="{8215B9B2-0B36-00CF-8CAC-1C89D23082E1}"/>
+                <a16:creationId xmlns:a16="http://schemas.microsoft.com/office/drawing/2014/main" id="{E09BF039-3F68-C729-6F76-EC6C830B8D9C}"/>
               </a:ext>
             </a:extLst>
           </p:cNvPr>
@@ -1796,7 +1797,7 @@
           <p:cNvPr id="73" name="Google Shape;73;g37ec9a311ae_0_1:notes">
             <a:extLst>
               <a:ext uri="{FF2B5EF4-FFF2-40B4-BE49-F238E27FC236}">
-                <a16:creationId xmlns:a16="http://schemas.microsoft.com/office/drawing/2014/main" id="{23F92366-6132-A676-AE0B-B382A7D85CFA}"/>
+                <a16:creationId xmlns:a16="http://schemas.microsoft.com/office/drawing/2014/main" id="{93441911-7EB3-2B61-DB0A-31B940B77F28}"/>
               </a:ext>
             </a:extLst>
           </p:cNvPr>
@@ -1838,6 +1839,133 @@
     </p:spTree>
     <p:extLst>
       <p:ext uri="{BB962C8B-B14F-4D97-AF65-F5344CB8AC3E}">
+        <p14:creationId xmlns:p14="http://schemas.microsoft.com/office/powerpoint/2010/main" val="3961964625"/>
+      </p:ext>
+    </p:extLst>
+  </p:cSld>
+  <p:clrMapOvr>
+    <a:masterClrMapping/>
+  </p:clrMapOvr>
+</p:notes>
+</file>
+
+<file path=ppt/notesSlides/notesSlide18.xml><?xml version="1.0" encoding="utf-8"?>
+<p:notes xmlns:a="http://schemas.openxmlformats.org/drawingml/2006/main" xmlns:r="http://schemas.openxmlformats.org/officeDocument/2006/relationships" xmlns:p="http://schemas.openxmlformats.org/presentationml/2006/main" showMasterSp="0" showMasterPhAnim="0">
+  <p:cSld>
+    <p:spTree>
+      <p:nvGrpSpPr>
+        <p:cNvPr id="1" name="Shape 71">
+          <a:extLst>
+            <a:ext uri="{FF2B5EF4-FFF2-40B4-BE49-F238E27FC236}">
+              <a16:creationId xmlns:a16="http://schemas.microsoft.com/office/drawing/2014/main" id="{335A3E43-DD13-9D35-4957-4EEF593CDAF4}"/>
+            </a:ext>
+          </a:extLst>
+        </p:cNvPr>
+        <p:cNvGrpSpPr/>
+        <p:nvPr/>
+      </p:nvGrpSpPr>
+      <p:grpSpPr>
+        <a:xfrm>
+          <a:off x="0" y="0"/>
+          <a:ext cx="0" cy="0"/>
+          <a:chOff x="0" y="0"/>
+          <a:chExt cx="0" cy="0"/>
+        </a:xfrm>
+      </p:grpSpPr>
+      <p:sp>
+        <p:nvSpPr>
+          <p:cNvPr id="72" name="Google Shape;72;g37ec9a311ae_0_1:notes">
+            <a:extLst>
+              <a:ext uri="{FF2B5EF4-FFF2-40B4-BE49-F238E27FC236}">
+                <a16:creationId xmlns:a16="http://schemas.microsoft.com/office/drawing/2014/main" id="{8215B9B2-0B36-00CF-8CAC-1C89D23082E1}"/>
+              </a:ext>
+            </a:extLst>
+          </p:cNvPr>
+          <p:cNvSpPr>
+            <a:spLocks noGrp="1" noRot="1" noChangeAspect="1"/>
+          </p:cNvSpPr>
+          <p:nvPr>
+            <p:ph type="sldImg" idx="2"/>
+          </p:nvPr>
+        </p:nvSpPr>
+        <p:spPr>
+          <a:xfrm>
+            <a:off x="381000" y="685800"/>
+            <a:ext cx="6096000" cy="3429000"/>
+          </a:xfrm>
+          <a:custGeom>
+            <a:avLst/>
+            <a:gdLst/>
+            <a:ahLst/>
+            <a:cxnLst/>
+            <a:rect l="l" t="t" r="r" b="b"/>
+            <a:pathLst>
+              <a:path w="120000" h="120000" extrusionOk="0">
+                <a:moveTo>
+                  <a:pt x="0" y="0"/>
+                </a:moveTo>
+                <a:lnTo>
+                  <a:pt x="120000" y="0"/>
+                </a:lnTo>
+                <a:lnTo>
+                  <a:pt x="120000" y="120000"/>
+                </a:lnTo>
+                <a:lnTo>
+                  <a:pt x="0" y="120000"/>
+                </a:lnTo>
+                <a:close/>
+              </a:path>
+            </a:pathLst>
+          </a:custGeom>
+        </p:spPr>
+      </p:sp>
+      <p:sp>
+        <p:nvSpPr>
+          <p:cNvPr id="73" name="Google Shape;73;g37ec9a311ae_0_1:notes">
+            <a:extLst>
+              <a:ext uri="{FF2B5EF4-FFF2-40B4-BE49-F238E27FC236}">
+                <a16:creationId xmlns:a16="http://schemas.microsoft.com/office/drawing/2014/main" id="{23F92366-6132-A676-AE0B-B382A7D85CFA}"/>
+              </a:ext>
+            </a:extLst>
+          </p:cNvPr>
+          <p:cNvSpPr txBox="1">
+            <a:spLocks noGrp="1"/>
+          </p:cNvSpPr>
+          <p:nvPr>
+            <p:ph type="body" idx="1"/>
+          </p:nvPr>
+        </p:nvSpPr>
+        <p:spPr>
+          <a:xfrm>
+            <a:off x="685800" y="4343400"/>
+            <a:ext cx="5486400" cy="4114800"/>
+          </a:xfrm>
+          <a:prstGeom prst="rect">
+            <a:avLst/>
+          </a:prstGeom>
+        </p:spPr>
+        <p:txBody>
+          <a:bodyPr spcFirstLastPara="1" wrap="square" lIns="91425" tIns="91425" rIns="91425" bIns="91425" anchor="t" anchorCtr="0">
+            <a:noAutofit/>
+          </a:bodyPr>
+          <a:lstStyle/>
+          <a:p>
+            <a:pPr marL="0" lvl="0" indent="0" algn="l" rtl="0">
+              <a:spcBef>
+                <a:spcPts val="0"/>
+              </a:spcBef>
+              <a:spcAft>
+                <a:spcPts val="0"/>
+              </a:spcAft>
+              <a:buNone/>
+            </a:pPr>
+            <a:endParaRPr/>
+          </a:p>
+        </p:txBody>
+      </p:sp>
+    </p:spTree>
+    <p:extLst>
+      <p:ext uri="{BB962C8B-B14F-4D97-AF65-F5344CB8AC3E}">
         <p14:creationId xmlns:p14="http://schemas.microsoft.com/office/powerpoint/2010/main" val="2870587417"/>
       </p:ext>
     </p:extLst>
@@ -1848,7 +1976,7 @@
 </p:notes>
 </file>
 
-<file path=ppt/notesSlides/notesSlide18.xml><?xml version="1.0" encoding="utf-8"?>
+<file path=ppt/notesSlides/notesSlide19.xml><?xml version="1.0" encoding="utf-8"?>
 <p:notes xmlns:a="http://schemas.openxmlformats.org/drawingml/2006/main" xmlns:r="http://schemas.openxmlformats.org/officeDocument/2006/relationships" xmlns:p="http://schemas.openxmlformats.org/presentationml/2006/main" showMasterSp="0" showMasterPhAnim="0">
   <p:cSld>
     <p:spTree>
@@ -2422,7 +2550,7 @@
         <p:cNvPr id="1" name="Shape 71">
           <a:extLst>
             <a:ext uri="{FF2B5EF4-FFF2-40B4-BE49-F238E27FC236}">
-              <a16:creationId xmlns:a16="http://schemas.microsoft.com/office/drawing/2014/main" id="{555F0672-DFD3-A016-23D1-70FA76B8C8CB}"/>
+              <a16:creationId xmlns:a16="http://schemas.microsoft.com/office/drawing/2014/main" id="{68CC045E-63D1-5CE1-4532-187D9E150399}"/>
             </a:ext>
           </a:extLst>
         </p:cNvPr>
@@ -2442,7 +2570,7 @@
           <p:cNvPr id="72" name="Google Shape;72;g37ec9a311ae_0_1:notes">
             <a:extLst>
               <a:ext uri="{FF2B5EF4-FFF2-40B4-BE49-F238E27FC236}">
-                <a16:creationId xmlns:a16="http://schemas.microsoft.com/office/drawing/2014/main" id="{61E7EEEA-E3A7-7042-C994-40B4AB4D12B6}"/>
+                <a16:creationId xmlns:a16="http://schemas.microsoft.com/office/drawing/2014/main" id="{BD706F40-F7C3-1245-7E24-7E63AC63111E}"/>
               </a:ext>
             </a:extLst>
           </p:cNvPr>
@@ -2489,7 +2617,7 @@
           <p:cNvPr id="73" name="Google Shape;73;g37ec9a311ae_0_1:notes">
             <a:extLst>
               <a:ext uri="{FF2B5EF4-FFF2-40B4-BE49-F238E27FC236}">
-                <a16:creationId xmlns:a16="http://schemas.microsoft.com/office/drawing/2014/main" id="{4802D64F-9D3F-5657-6DEB-5DEAB6B42256}"/>
+                <a16:creationId xmlns:a16="http://schemas.microsoft.com/office/drawing/2014/main" id="{6D411ADC-EDF7-5A84-EEBF-E10D00BAB1CC}"/>
               </a:ext>
             </a:extLst>
           </p:cNvPr>
@@ -2531,7 +2659,7 @@
     </p:spTree>
     <p:extLst>
       <p:ext uri="{BB962C8B-B14F-4D97-AF65-F5344CB8AC3E}">
-        <p14:creationId xmlns:p14="http://schemas.microsoft.com/office/powerpoint/2010/main" val="2116875636"/>
+        <p14:creationId xmlns:p14="http://schemas.microsoft.com/office/powerpoint/2010/main" val="369355875"/>
       </p:ext>
     </p:extLst>
   </p:cSld>
@@ -2549,7 +2677,7 @@
         <p:cNvPr id="1" name="Shape 71">
           <a:extLst>
             <a:ext uri="{FF2B5EF4-FFF2-40B4-BE49-F238E27FC236}">
-              <a16:creationId xmlns:a16="http://schemas.microsoft.com/office/drawing/2014/main" id="{4AF8D5A6-5F29-FC27-4009-4101C51ADB6C}"/>
+              <a16:creationId xmlns:a16="http://schemas.microsoft.com/office/drawing/2014/main" id="{555F0672-DFD3-A016-23D1-70FA76B8C8CB}"/>
             </a:ext>
           </a:extLst>
         </p:cNvPr>
@@ -2569,7 +2697,7 @@
           <p:cNvPr id="72" name="Google Shape;72;g37ec9a311ae_0_1:notes">
             <a:extLst>
               <a:ext uri="{FF2B5EF4-FFF2-40B4-BE49-F238E27FC236}">
-                <a16:creationId xmlns:a16="http://schemas.microsoft.com/office/drawing/2014/main" id="{23C0C2B5-840F-7BCE-3948-DB479FABD9A8}"/>
+                <a16:creationId xmlns:a16="http://schemas.microsoft.com/office/drawing/2014/main" id="{61E7EEEA-E3A7-7042-C994-40B4AB4D12B6}"/>
               </a:ext>
             </a:extLst>
           </p:cNvPr>
@@ -2616,7 +2744,7 @@
           <p:cNvPr id="73" name="Google Shape;73;g37ec9a311ae_0_1:notes">
             <a:extLst>
               <a:ext uri="{FF2B5EF4-FFF2-40B4-BE49-F238E27FC236}">
-                <a16:creationId xmlns:a16="http://schemas.microsoft.com/office/drawing/2014/main" id="{22AF71EB-D651-92D9-BC83-BEFBE7DC4674}"/>
+                <a16:creationId xmlns:a16="http://schemas.microsoft.com/office/drawing/2014/main" id="{4802D64F-9D3F-5657-6DEB-5DEAB6B42256}"/>
               </a:ext>
             </a:extLst>
           </p:cNvPr>
@@ -2658,7 +2786,7 @@
     </p:spTree>
     <p:extLst>
       <p:ext uri="{BB962C8B-B14F-4D97-AF65-F5344CB8AC3E}">
-        <p14:creationId xmlns:p14="http://schemas.microsoft.com/office/powerpoint/2010/main" val="239388607"/>
+        <p14:creationId xmlns:p14="http://schemas.microsoft.com/office/powerpoint/2010/main" val="2116875636"/>
       </p:ext>
     </p:extLst>
   </p:cSld>
@@ -2676,7 +2804,7 @@
         <p:cNvPr id="1" name="Shape 71">
           <a:extLst>
             <a:ext uri="{FF2B5EF4-FFF2-40B4-BE49-F238E27FC236}">
-              <a16:creationId xmlns:a16="http://schemas.microsoft.com/office/drawing/2014/main" id="{705D0B06-E5BA-F335-932D-1473A9885B65}"/>
+              <a16:creationId xmlns:a16="http://schemas.microsoft.com/office/drawing/2014/main" id="{4AF8D5A6-5F29-FC27-4009-4101C51ADB6C}"/>
             </a:ext>
           </a:extLst>
         </p:cNvPr>
@@ -2696,7 +2824,7 @@
           <p:cNvPr id="72" name="Google Shape;72;g37ec9a311ae_0_1:notes">
             <a:extLst>
               <a:ext uri="{FF2B5EF4-FFF2-40B4-BE49-F238E27FC236}">
-                <a16:creationId xmlns:a16="http://schemas.microsoft.com/office/drawing/2014/main" id="{E6980E3E-718C-DE0B-E620-04A475D0BDAD}"/>
+                <a16:creationId xmlns:a16="http://schemas.microsoft.com/office/drawing/2014/main" id="{23C0C2B5-840F-7BCE-3948-DB479FABD9A8}"/>
               </a:ext>
             </a:extLst>
           </p:cNvPr>
@@ -2743,7 +2871,7 @@
           <p:cNvPr id="73" name="Google Shape;73;g37ec9a311ae_0_1:notes">
             <a:extLst>
               <a:ext uri="{FF2B5EF4-FFF2-40B4-BE49-F238E27FC236}">
-                <a16:creationId xmlns:a16="http://schemas.microsoft.com/office/drawing/2014/main" id="{FE8CF83B-D9DC-CEB5-BD3B-AD0088FD8FF4}"/>
+                <a16:creationId xmlns:a16="http://schemas.microsoft.com/office/drawing/2014/main" id="{22AF71EB-D651-92D9-BC83-BEFBE7DC4674}"/>
               </a:ext>
             </a:extLst>
           </p:cNvPr>
@@ -2785,7 +2913,7 @@
     </p:spTree>
     <p:extLst>
       <p:ext uri="{BB962C8B-B14F-4D97-AF65-F5344CB8AC3E}">
-        <p14:creationId xmlns:p14="http://schemas.microsoft.com/office/powerpoint/2010/main" val="1242109808"/>
+        <p14:creationId xmlns:p14="http://schemas.microsoft.com/office/powerpoint/2010/main" val="239388607"/>
       </p:ext>
     </p:extLst>
   </p:cSld>
@@ -2803,7 +2931,7 @@
         <p:cNvPr id="1" name="Shape 71">
           <a:extLst>
             <a:ext uri="{FF2B5EF4-FFF2-40B4-BE49-F238E27FC236}">
-              <a16:creationId xmlns:a16="http://schemas.microsoft.com/office/drawing/2014/main" id="{7840ED41-044F-6EE6-399D-7C8AF37D6706}"/>
+              <a16:creationId xmlns:a16="http://schemas.microsoft.com/office/drawing/2014/main" id="{705D0B06-E5BA-F335-932D-1473A9885B65}"/>
             </a:ext>
           </a:extLst>
         </p:cNvPr>
@@ -2823,7 +2951,7 @@
           <p:cNvPr id="72" name="Google Shape;72;g37ec9a311ae_0_1:notes">
             <a:extLst>
               <a:ext uri="{FF2B5EF4-FFF2-40B4-BE49-F238E27FC236}">
-                <a16:creationId xmlns:a16="http://schemas.microsoft.com/office/drawing/2014/main" id="{9C1A1729-1454-4017-525D-606B70CE5CE8}"/>
+                <a16:creationId xmlns:a16="http://schemas.microsoft.com/office/drawing/2014/main" id="{E6980E3E-718C-DE0B-E620-04A475D0BDAD}"/>
               </a:ext>
             </a:extLst>
           </p:cNvPr>
@@ -2870,7 +2998,7 @@
           <p:cNvPr id="73" name="Google Shape;73;g37ec9a311ae_0_1:notes">
             <a:extLst>
               <a:ext uri="{FF2B5EF4-FFF2-40B4-BE49-F238E27FC236}">
-                <a16:creationId xmlns:a16="http://schemas.microsoft.com/office/drawing/2014/main" id="{034EBF85-E636-C675-74DC-F46AC10A0828}"/>
+                <a16:creationId xmlns:a16="http://schemas.microsoft.com/office/drawing/2014/main" id="{FE8CF83B-D9DC-CEB5-BD3B-AD0088FD8FF4}"/>
               </a:ext>
             </a:extLst>
           </p:cNvPr>
@@ -2912,7 +3040,7 @@
     </p:spTree>
     <p:extLst>
       <p:ext uri="{BB962C8B-B14F-4D97-AF65-F5344CB8AC3E}">
-        <p14:creationId xmlns:p14="http://schemas.microsoft.com/office/powerpoint/2010/main" val="3331348892"/>
+        <p14:creationId xmlns:p14="http://schemas.microsoft.com/office/powerpoint/2010/main" val="1242109808"/>
       </p:ext>
     </p:extLst>
   </p:cSld>
@@ -7906,7 +8034,7 @@
                 <a:cs typeface="Calibri"/>
                 <a:sym typeface="Calibri"/>
               </a:rPr>
-              <a:t>Pose Standards</a:t>
+              <a:t>(Geo)Pose and Standards</a:t>
             </a:r>
             <a:endParaRPr sz="8600" dirty="0">
               <a:latin typeface="Calibri"/>
@@ -7959,7 +8087,7 @@
                 <a:cs typeface="Calibri"/>
                 <a:sym typeface="Calibri"/>
               </a:rPr>
-              <a:t>Standards enable communication of Pose.</a:t>
+              <a:t>Standards enable communication of Pose</a:t>
             </a:r>
             <a:endParaRPr sz="2060" dirty="0">
               <a:latin typeface="Calibri"/>
@@ -8042,7 +8170,7 @@
         <p:cNvPr id="1" name="Shape 74">
           <a:extLst>
             <a:ext uri="{FF2B5EF4-FFF2-40B4-BE49-F238E27FC236}">
-              <a16:creationId xmlns:a16="http://schemas.microsoft.com/office/drawing/2014/main" id="{8A2676C8-E12F-8DF3-6378-7132729125A1}"/>
+              <a16:creationId xmlns:a16="http://schemas.microsoft.com/office/drawing/2014/main" id="{D40C9DFB-041B-1A6A-25B4-D8E52B5A3D0F}"/>
             </a:ext>
           </a:extLst>
         </p:cNvPr>
@@ -8062,7 +8190,7 @@
           <p:cNvPr id="75" name="Google Shape;75;p15">
             <a:extLst>
               <a:ext uri="{FF2B5EF4-FFF2-40B4-BE49-F238E27FC236}">
-                <a16:creationId xmlns:a16="http://schemas.microsoft.com/office/drawing/2014/main" id="{B287DD68-9CC4-E70C-A014-10715CB50530}"/>
+                <a16:creationId xmlns:a16="http://schemas.microsoft.com/office/drawing/2014/main" id="{7C5241A9-E736-9972-289D-6721844EE792}"/>
               </a:ext>
             </a:extLst>
           </p:cNvPr>
@@ -8129,7 +8257,7 @@
           <p:cNvPr id="3" name="Subtitle 2">
             <a:extLst>
               <a:ext uri="{FF2B5EF4-FFF2-40B4-BE49-F238E27FC236}">
-                <a16:creationId xmlns:a16="http://schemas.microsoft.com/office/drawing/2014/main" id="{6A670715-AAEF-2B1A-EF53-08917C2F2BBA}"/>
+                <a16:creationId xmlns:a16="http://schemas.microsoft.com/office/drawing/2014/main" id="{8CCA28EA-3FF8-967F-F08A-E954C69E5F74}"/>
               </a:ext>
             </a:extLst>
           </p:cNvPr>
@@ -8152,7 +8280,7 @@
     </p:spTree>
     <p:extLst>
       <p:ext uri="{BB962C8B-B14F-4D97-AF65-F5344CB8AC3E}">
-        <p14:creationId xmlns:p14="http://schemas.microsoft.com/office/powerpoint/2010/main" val="1396229668"/>
+        <p14:creationId xmlns:p14="http://schemas.microsoft.com/office/powerpoint/2010/main" val="1067124632"/>
       </p:ext>
     </p:extLst>
   </p:cSld>
@@ -8170,7 +8298,7 @@
         <p:cNvPr id="1" name="Shape 74">
           <a:extLst>
             <a:ext uri="{FF2B5EF4-FFF2-40B4-BE49-F238E27FC236}">
-              <a16:creationId xmlns:a16="http://schemas.microsoft.com/office/drawing/2014/main" id="{B26C5146-CFB9-F29E-B3F3-9AAB9C727C3A}"/>
+              <a16:creationId xmlns:a16="http://schemas.microsoft.com/office/drawing/2014/main" id="{8A2676C8-E12F-8DF3-6378-7132729125A1}"/>
             </a:ext>
           </a:extLst>
         </p:cNvPr>
@@ -8190,7 +8318,7 @@
           <p:cNvPr id="75" name="Google Shape;75;p15">
             <a:extLst>
               <a:ext uri="{FF2B5EF4-FFF2-40B4-BE49-F238E27FC236}">
-                <a16:creationId xmlns:a16="http://schemas.microsoft.com/office/drawing/2014/main" id="{CE4DB471-478F-113B-AE80-BD21982B282B}"/>
+                <a16:creationId xmlns:a16="http://schemas.microsoft.com/office/drawing/2014/main" id="{B287DD68-9CC4-E70C-A014-10715CB50530}"/>
               </a:ext>
             </a:extLst>
           </p:cNvPr>
@@ -8257,7 +8385,7 @@
           <p:cNvPr id="3" name="Subtitle 2">
             <a:extLst>
               <a:ext uri="{FF2B5EF4-FFF2-40B4-BE49-F238E27FC236}">
-                <a16:creationId xmlns:a16="http://schemas.microsoft.com/office/drawing/2014/main" id="{0B0A0929-4F53-7DCA-A2B8-532B9A07E354}"/>
+                <a16:creationId xmlns:a16="http://schemas.microsoft.com/office/drawing/2014/main" id="{6A670715-AAEF-2B1A-EF53-08917C2F2BBA}"/>
               </a:ext>
             </a:extLst>
           </p:cNvPr>
@@ -8280,7 +8408,7 @@
     </p:spTree>
     <p:extLst>
       <p:ext uri="{BB962C8B-B14F-4D97-AF65-F5344CB8AC3E}">
-        <p14:creationId xmlns:p14="http://schemas.microsoft.com/office/powerpoint/2010/main" val="2958373009"/>
+        <p14:creationId xmlns:p14="http://schemas.microsoft.com/office/powerpoint/2010/main" val="1396229668"/>
       </p:ext>
     </p:extLst>
   </p:cSld>
@@ -8298,7 +8426,7 @@
         <p:cNvPr id="1" name="Shape 74">
           <a:extLst>
             <a:ext uri="{FF2B5EF4-FFF2-40B4-BE49-F238E27FC236}">
-              <a16:creationId xmlns:a16="http://schemas.microsoft.com/office/drawing/2014/main" id="{2DD77329-34E0-1001-0E30-35B7325E70F5}"/>
+              <a16:creationId xmlns:a16="http://schemas.microsoft.com/office/drawing/2014/main" id="{B26C5146-CFB9-F29E-B3F3-9AAB9C727C3A}"/>
             </a:ext>
           </a:extLst>
         </p:cNvPr>
@@ -8318,7 +8446,7 @@
           <p:cNvPr id="75" name="Google Shape;75;p15">
             <a:extLst>
               <a:ext uri="{FF2B5EF4-FFF2-40B4-BE49-F238E27FC236}">
-                <a16:creationId xmlns:a16="http://schemas.microsoft.com/office/drawing/2014/main" id="{375F6026-90EE-BBBE-30A5-A456607C5426}"/>
+                <a16:creationId xmlns:a16="http://schemas.microsoft.com/office/drawing/2014/main" id="{CE4DB471-478F-113B-AE80-BD21982B282B}"/>
               </a:ext>
             </a:extLst>
           </p:cNvPr>
@@ -8385,7 +8513,7 @@
           <p:cNvPr id="3" name="Subtitle 2">
             <a:extLst>
               <a:ext uri="{FF2B5EF4-FFF2-40B4-BE49-F238E27FC236}">
-                <a16:creationId xmlns:a16="http://schemas.microsoft.com/office/drawing/2014/main" id="{AE32FA2C-F234-24F6-C000-1F3A5BDD813C}"/>
+                <a16:creationId xmlns:a16="http://schemas.microsoft.com/office/drawing/2014/main" id="{0B0A0929-4F53-7DCA-A2B8-532B9A07E354}"/>
               </a:ext>
             </a:extLst>
           </p:cNvPr>
@@ -8408,7 +8536,7 @@
     </p:spTree>
     <p:extLst>
       <p:ext uri="{BB962C8B-B14F-4D97-AF65-F5344CB8AC3E}">
-        <p14:creationId xmlns:p14="http://schemas.microsoft.com/office/powerpoint/2010/main" val="3155832597"/>
+        <p14:creationId xmlns:p14="http://schemas.microsoft.com/office/powerpoint/2010/main" val="2958373009"/>
       </p:ext>
     </p:extLst>
   </p:cSld>
@@ -8426,7 +8554,7 @@
         <p:cNvPr id="1" name="Shape 74">
           <a:extLst>
             <a:ext uri="{FF2B5EF4-FFF2-40B4-BE49-F238E27FC236}">
-              <a16:creationId xmlns:a16="http://schemas.microsoft.com/office/drawing/2014/main" id="{EACA69A0-F379-9F5A-5ED7-6ECD1F612314}"/>
+              <a16:creationId xmlns:a16="http://schemas.microsoft.com/office/drawing/2014/main" id="{2DD77329-34E0-1001-0E30-35B7325E70F5}"/>
             </a:ext>
           </a:extLst>
         </p:cNvPr>
@@ -8446,7 +8574,7 @@
           <p:cNvPr id="75" name="Google Shape;75;p15">
             <a:extLst>
               <a:ext uri="{FF2B5EF4-FFF2-40B4-BE49-F238E27FC236}">
-                <a16:creationId xmlns:a16="http://schemas.microsoft.com/office/drawing/2014/main" id="{55B82C80-5D7A-20C2-498B-6EDD85E3535A}"/>
+                <a16:creationId xmlns:a16="http://schemas.microsoft.com/office/drawing/2014/main" id="{375F6026-90EE-BBBE-30A5-A456607C5426}"/>
               </a:ext>
             </a:extLst>
           </p:cNvPr>
@@ -8513,7 +8641,7 @@
           <p:cNvPr id="3" name="Subtitle 2">
             <a:extLst>
               <a:ext uri="{FF2B5EF4-FFF2-40B4-BE49-F238E27FC236}">
-                <a16:creationId xmlns:a16="http://schemas.microsoft.com/office/drawing/2014/main" id="{FEC2D9E3-48F7-2BE8-73DD-0844B8C1F97D}"/>
+                <a16:creationId xmlns:a16="http://schemas.microsoft.com/office/drawing/2014/main" id="{AE32FA2C-F234-24F6-C000-1F3A5BDD813C}"/>
               </a:ext>
             </a:extLst>
           </p:cNvPr>
@@ -8536,7 +8664,7 @@
     </p:spTree>
     <p:extLst>
       <p:ext uri="{BB962C8B-B14F-4D97-AF65-F5344CB8AC3E}">
-        <p14:creationId xmlns:p14="http://schemas.microsoft.com/office/powerpoint/2010/main" val="2928402100"/>
+        <p14:creationId xmlns:p14="http://schemas.microsoft.com/office/powerpoint/2010/main" val="3155832597"/>
       </p:ext>
     </p:extLst>
   </p:cSld>
@@ -8554,7 +8682,7 @@
         <p:cNvPr id="1" name="Shape 74">
           <a:extLst>
             <a:ext uri="{FF2B5EF4-FFF2-40B4-BE49-F238E27FC236}">
-              <a16:creationId xmlns:a16="http://schemas.microsoft.com/office/drawing/2014/main" id="{DDFC5E54-3225-1645-1847-C46AC9F351F7}"/>
+              <a16:creationId xmlns:a16="http://schemas.microsoft.com/office/drawing/2014/main" id="{EACA69A0-F379-9F5A-5ED7-6ECD1F612314}"/>
             </a:ext>
           </a:extLst>
         </p:cNvPr>
@@ -8574,7 +8702,7 @@
           <p:cNvPr id="75" name="Google Shape;75;p15">
             <a:extLst>
               <a:ext uri="{FF2B5EF4-FFF2-40B4-BE49-F238E27FC236}">
-                <a16:creationId xmlns:a16="http://schemas.microsoft.com/office/drawing/2014/main" id="{3B1CE385-DA02-535A-F574-24D8ACFEF617}"/>
+                <a16:creationId xmlns:a16="http://schemas.microsoft.com/office/drawing/2014/main" id="{55B82C80-5D7A-20C2-498B-6EDD85E3535A}"/>
               </a:ext>
             </a:extLst>
           </p:cNvPr>
@@ -8641,7 +8769,7 @@
           <p:cNvPr id="3" name="Subtitle 2">
             <a:extLst>
               <a:ext uri="{FF2B5EF4-FFF2-40B4-BE49-F238E27FC236}">
-                <a16:creationId xmlns:a16="http://schemas.microsoft.com/office/drawing/2014/main" id="{7EDA6AD7-EBE3-E308-F613-D02500A0D21F}"/>
+                <a16:creationId xmlns:a16="http://schemas.microsoft.com/office/drawing/2014/main" id="{FEC2D9E3-48F7-2BE8-73DD-0844B8C1F97D}"/>
               </a:ext>
             </a:extLst>
           </p:cNvPr>
@@ -8664,7 +8792,7 @@
     </p:spTree>
     <p:extLst>
       <p:ext uri="{BB962C8B-B14F-4D97-AF65-F5344CB8AC3E}">
-        <p14:creationId xmlns:p14="http://schemas.microsoft.com/office/powerpoint/2010/main" val="2155708937"/>
+        <p14:creationId xmlns:p14="http://schemas.microsoft.com/office/powerpoint/2010/main" val="2928402100"/>
       </p:ext>
     </p:extLst>
   </p:cSld>
@@ -8682,7 +8810,7 @@
         <p:cNvPr id="1" name="Shape 74">
           <a:extLst>
             <a:ext uri="{FF2B5EF4-FFF2-40B4-BE49-F238E27FC236}">
-              <a16:creationId xmlns:a16="http://schemas.microsoft.com/office/drawing/2014/main" id="{AF7BE0CA-F09D-907A-86C7-A6054EE1CA14}"/>
+              <a16:creationId xmlns:a16="http://schemas.microsoft.com/office/drawing/2014/main" id="{DDFC5E54-3225-1645-1847-C46AC9F351F7}"/>
             </a:ext>
           </a:extLst>
         </p:cNvPr>
@@ -8702,7 +8830,7 @@
           <p:cNvPr id="75" name="Google Shape;75;p15">
             <a:extLst>
               <a:ext uri="{FF2B5EF4-FFF2-40B4-BE49-F238E27FC236}">
-                <a16:creationId xmlns:a16="http://schemas.microsoft.com/office/drawing/2014/main" id="{866AD0A2-1342-41DF-492D-C6DC86BB6DBD}"/>
+                <a16:creationId xmlns:a16="http://schemas.microsoft.com/office/drawing/2014/main" id="{3B1CE385-DA02-535A-F574-24D8ACFEF617}"/>
               </a:ext>
             </a:extLst>
           </p:cNvPr>
@@ -8769,7 +8897,7 @@
           <p:cNvPr id="3" name="Subtitle 2">
             <a:extLst>
               <a:ext uri="{FF2B5EF4-FFF2-40B4-BE49-F238E27FC236}">
-                <a16:creationId xmlns:a16="http://schemas.microsoft.com/office/drawing/2014/main" id="{18AA9F3E-E4CB-DE29-AA0A-CF71A5726430}"/>
+                <a16:creationId xmlns:a16="http://schemas.microsoft.com/office/drawing/2014/main" id="{7EDA6AD7-EBE3-E308-F613-D02500A0D21F}"/>
               </a:ext>
             </a:extLst>
           </p:cNvPr>
@@ -8792,7 +8920,7 @@
     </p:spTree>
     <p:extLst>
       <p:ext uri="{BB962C8B-B14F-4D97-AF65-F5344CB8AC3E}">
-        <p14:creationId xmlns:p14="http://schemas.microsoft.com/office/powerpoint/2010/main" val="1505705405"/>
+        <p14:creationId xmlns:p14="http://schemas.microsoft.com/office/powerpoint/2010/main" val="2155708937"/>
       </p:ext>
     </p:extLst>
   </p:cSld>
@@ -8810,7 +8938,7 @@
         <p:cNvPr id="1" name="Shape 74">
           <a:extLst>
             <a:ext uri="{FF2B5EF4-FFF2-40B4-BE49-F238E27FC236}">
-              <a16:creationId xmlns:a16="http://schemas.microsoft.com/office/drawing/2014/main" id="{EE3039C5-FA39-179E-4BC0-0E47315805C6}"/>
+              <a16:creationId xmlns:a16="http://schemas.microsoft.com/office/drawing/2014/main" id="{AF7BE0CA-F09D-907A-86C7-A6054EE1CA14}"/>
             </a:ext>
           </a:extLst>
         </p:cNvPr>
@@ -8830,7 +8958,7 @@
           <p:cNvPr id="75" name="Google Shape;75;p15">
             <a:extLst>
               <a:ext uri="{FF2B5EF4-FFF2-40B4-BE49-F238E27FC236}">
-                <a16:creationId xmlns:a16="http://schemas.microsoft.com/office/drawing/2014/main" id="{601F0F7D-F2AA-3AAB-839D-53B9F7487117}"/>
+                <a16:creationId xmlns:a16="http://schemas.microsoft.com/office/drawing/2014/main" id="{866AD0A2-1342-41DF-492D-C6DC86BB6DBD}"/>
               </a:ext>
             </a:extLst>
           </p:cNvPr>
@@ -8897,7 +9025,7 @@
           <p:cNvPr id="3" name="Subtitle 2">
             <a:extLst>
               <a:ext uri="{FF2B5EF4-FFF2-40B4-BE49-F238E27FC236}">
-                <a16:creationId xmlns:a16="http://schemas.microsoft.com/office/drawing/2014/main" id="{30AE4744-81CC-F9A9-CA41-587C94DB28EA}"/>
+                <a16:creationId xmlns:a16="http://schemas.microsoft.com/office/drawing/2014/main" id="{18AA9F3E-E4CB-DE29-AA0A-CF71A5726430}"/>
               </a:ext>
             </a:extLst>
           </p:cNvPr>
@@ -8920,7 +9048,7 @@
     </p:spTree>
     <p:extLst>
       <p:ext uri="{BB962C8B-B14F-4D97-AF65-F5344CB8AC3E}">
-        <p14:creationId xmlns:p14="http://schemas.microsoft.com/office/powerpoint/2010/main" val="2299372584"/>
+        <p14:creationId xmlns:p14="http://schemas.microsoft.com/office/powerpoint/2010/main" val="1505705405"/>
       </p:ext>
     </p:extLst>
   </p:cSld>
@@ -8938,7 +9066,7 @@
         <p:cNvPr id="1" name="Shape 74">
           <a:extLst>
             <a:ext uri="{FF2B5EF4-FFF2-40B4-BE49-F238E27FC236}">
-              <a16:creationId xmlns:a16="http://schemas.microsoft.com/office/drawing/2014/main" id="{D1544E4C-9D05-B658-408D-56257B69C3A6}"/>
+              <a16:creationId xmlns:a16="http://schemas.microsoft.com/office/drawing/2014/main" id="{EE3039C5-FA39-179E-4BC0-0E47315805C6}"/>
             </a:ext>
           </a:extLst>
         </p:cNvPr>
@@ -8958,7 +9086,7 @@
           <p:cNvPr id="75" name="Google Shape;75;p15">
             <a:extLst>
               <a:ext uri="{FF2B5EF4-FFF2-40B4-BE49-F238E27FC236}">
-                <a16:creationId xmlns:a16="http://schemas.microsoft.com/office/drawing/2014/main" id="{AD3A99B6-E6B6-9294-F44A-5B4915EEEC27}"/>
+                <a16:creationId xmlns:a16="http://schemas.microsoft.com/office/drawing/2014/main" id="{601F0F7D-F2AA-3AAB-839D-53B9F7487117}"/>
               </a:ext>
             </a:extLst>
           </p:cNvPr>
@@ -9025,6 +9153,134 @@
           <p:cNvPr id="3" name="Subtitle 2">
             <a:extLst>
               <a:ext uri="{FF2B5EF4-FFF2-40B4-BE49-F238E27FC236}">
+                <a16:creationId xmlns:a16="http://schemas.microsoft.com/office/drawing/2014/main" id="{30AE4744-81CC-F9A9-CA41-587C94DB28EA}"/>
+              </a:ext>
+            </a:extLst>
+          </p:cNvPr>
+          <p:cNvSpPr>
+            <a:spLocks noGrp="1"/>
+          </p:cNvSpPr>
+          <p:nvPr>
+            <p:ph type="subTitle" idx="1"/>
+          </p:nvPr>
+        </p:nvSpPr>
+        <p:spPr/>
+        <p:txBody>
+          <a:bodyPr/>
+          <a:lstStyle/>
+          <a:p>
+            <a:endParaRPr lang="en-US"/>
+          </a:p>
+        </p:txBody>
+      </p:sp>
+    </p:spTree>
+    <p:extLst>
+      <p:ext uri="{BB962C8B-B14F-4D97-AF65-F5344CB8AC3E}">
+        <p14:creationId xmlns:p14="http://schemas.microsoft.com/office/powerpoint/2010/main" val="2299372584"/>
+      </p:ext>
+    </p:extLst>
+  </p:cSld>
+  <p:clrMapOvr>
+    <a:masterClrMapping/>
+  </p:clrMapOvr>
+</p:sld>
+</file>
+
+<file path=ppt/slides/slide18.xml><?xml version="1.0" encoding="utf-8"?>
+<p:sld xmlns:a="http://schemas.openxmlformats.org/drawingml/2006/main" xmlns:r="http://schemas.openxmlformats.org/officeDocument/2006/relationships" xmlns:p="http://schemas.openxmlformats.org/presentationml/2006/main">
+  <p:cSld>
+    <p:spTree>
+      <p:nvGrpSpPr>
+        <p:cNvPr id="1" name="Shape 74">
+          <a:extLst>
+            <a:ext uri="{FF2B5EF4-FFF2-40B4-BE49-F238E27FC236}">
+              <a16:creationId xmlns:a16="http://schemas.microsoft.com/office/drawing/2014/main" id="{D1544E4C-9D05-B658-408D-56257B69C3A6}"/>
+            </a:ext>
+          </a:extLst>
+        </p:cNvPr>
+        <p:cNvGrpSpPr/>
+        <p:nvPr/>
+      </p:nvGrpSpPr>
+      <p:grpSpPr>
+        <a:xfrm>
+          <a:off x="0" y="0"/>
+          <a:ext cx="0" cy="0"/>
+          <a:chOff x="0" y="0"/>
+          <a:chExt cx="0" cy="0"/>
+        </a:xfrm>
+      </p:grpSpPr>
+      <p:sp>
+        <p:nvSpPr>
+          <p:cNvPr id="75" name="Google Shape;75;p15">
+            <a:extLst>
+              <a:ext uri="{FF2B5EF4-FFF2-40B4-BE49-F238E27FC236}">
+                <a16:creationId xmlns:a16="http://schemas.microsoft.com/office/drawing/2014/main" id="{AD3A99B6-E6B6-9294-F44A-5B4915EEEC27}"/>
+              </a:ext>
+            </a:extLst>
+          </p:cNvPr>
+          <p:cNvSpPr txBox="1">
+            <a:spLocks noGrp="1"/>
+          </p:cNvSpPr>
+          <p:nvPr>
+            <p:ph type="ctrTitle"/>
+          </p:nvPr>
+        </p:nvSpPr>
+        <p:spPr>
+          <a:xfrm>
+            <a:off x="311700" y="744575"/>
+            <a:ext cx="8520600" cy="740700"/>
+          </a:xfrm>
+          <a:prstGeom prst="rect">
+            <a:avLst/>
+          </a:prstGeom>
+        </p:spPr>
+        <p:txBody>
+          <a:bodyPr spcFirstLastPara="1" wrap="square" lIns="91425" tIns="91425" rIns="91425" bIns="91425" anchor="b" anchorCtr="0">
+            <a:normAutofit fontScale="90000"/>
+          </a:bodyPr>
+          <a:lstStyle/>
+          <a:p>
+            <a:pPr marL="0" lvl="0" indent="0" algn="ctr" rtl="0">
+              <a:spcBef>
+                <a:spcPts val="0"/>
+              </a:spcBef>
+              <a:spcAft>
+                <a:spcPts val="0"/>
+              </a:spcAft>
+              <a:buNone/>
+            </a:pPr>
+            <a:r>
+              <a:rPr lang="en-US" dirty="0">
+                <a:latin typeface="Calibri"/>
+                <a:ea typeface="Calibri"/>
+                <a:cs typeface="Calibri"/>
+                <a:sym typeface="Calibri"/>
+              </a:rPr>
+              <a:t>Standards</a:t>
+            </a:r>
+            <a:r>
+              <a:rPr lang="en" dirty="0">
+                <a:latin typeface="Calibri"/>
+                <a:ea typeface="Calibri"/>
+                <a:cs typeface="Calibri"/>
+                <a:sym typeface="Calibri"/>
+              </a:rPr>
+              <a:t>-01</a:t>
+            </a:r>
+            <a:endParaRPr dirty="0">
+              <a:latin typeface="Calibri"/>
+              <a:ea typeface="Calibri"/>
+              <a:cs typeface="Calibri"/>
+              <a:sym typeface="Calibri"/>
+            </a:endParaRPr>
+          </a:p>
+        </p:txBody>
+      </p:sp>
+      <p:sp>
+        <p:nvSpPr>
+          <p:cNvPr id="3" name="Subtitle 2">
+            <a:extLst>
+              <a:ext uri="{FF2B5EF4-FFF2-40B4-BE49-F238E27FC236}">
                 <a16:creationId xmlns:a16="http://schemas.microsoft.com/office/drawing/2014/main" id="{058C6AD6-FA09-8CF5-E2FE-EDA34DDD9344}"/>
               </a:ext>
             </a:extLst>
@@ -9058,7 +9314,7 @@
 </p:sld>
 </file>
 
-<file path=ppt/slides/slide18.xml><?xml version="1.0" encoding="utf-8"?>
+<file path=ppt/slides/slide19.xml><?xml version="1.0" encoding="utf-8"?>
 <p:sld xmlns:a="http://schemas.openxmlformats.org/drawingml/2006/main" xmlns:r="http://schemas.openxmlformats.org/officeDocument/2006/relationships" xmlns:p="http://schemas.openxmlformats.org/presentationml/2006/main">
   <p:cSld>
     <p:spTree>
@@ -9300,54 +9556,71 @@
         <p:spPr/>
         <p:txBody>
           <a:bodyPr>
-            <a:normAutofit fontScale="25000" lnSpcReduction="20000"/>
+            <a:noAutofit/>
           </a:bodyPr>
           <a:lstStyle/>
           <a:p>
             <a:r>
-              <a:rPr lang="en-US" dirty="0"/>
+              <a:rPr lang="en-US" sz="1200" dirty="0"/>
               <a:t>Standards enable communication.</a:t>
             </a:r>
           </a:p>
           <a:p>
             <a:r>
-              <a:rPr lang="en-US" dirty="0"/>
+              <a:rPr lang="en-US" sz="1200" dirty="0"/>
               <a:t>Both concepts and expressions of Pose content can be standardized.</a:t>
             </a:r>
           </a:p>
           <a:p>
             <a:r>
-              <a:rPr lang="en-US" dirty="0"/>
+              <a:rPr lang="en-US" sz="1200" dirty="0"/>
               <a:t>Standardization of concepts extends beyond a single domain,</a:t>
             </a:r>
           </a:p>
           <a:p>
             <a:r>
-              <a:rPr lang="en-US" dirty="0"/>
-              <a:t>Stardardization of data elements – data types and classes – enables interoperation</a:t>
+              <a:rPr lang="en-US" sz="1200" dirty="0"/>
+              <a:t>Standardization of data elements – data types and classes – enables interoperation</a:t>
             </a:r>
           </a:p>
           <a:p>
             <a:r>
-              <a:rPr lang="en-US" dirty="0"/>
+              <a:rPr lang="en-US" sz="1200" dirty="0"/>
               <a:t>Primitive data types</a:t>
             </a:r>
           </a:p>
           <a:p>
             <a:r>
-              <a:rPr lang="en-US" dirty="0" err="1"/>
+              <a:rPr lang="en-US" sz="1200" dirty="0" err="1"/>
               <a:t>Semanticized</a:t>
             </a:r>
             <a:r>
-              <a:rPr lang="en-US" dirty="0"/>
+              <a:rPr lang="en-US" sz="1200" dirty="0"/>
               <a:t> data types</a:t>
             </a:r>
           </a:p>
           <a:p>
             <a:r>
-              <a:rPr lang="en-US" dirty="0"/>
+              <a:rPr lang="en-US" sz="1200" dirty="0"/>
               <a:t>Classes </a:t>
             </a:r>
+          </a:p>
+          <a:p>
+            <a:r>
+              <a:rPr lang="en-US" sz="1200" dirty="0"/>
+              <a:t>Example: </a:t>
+            </a:r>
+            <a:r>
+              <a:rPr lang="en-US" sz="1200" dirty="0" err="1"/>
+              <a:t>glTF</a:t>
+            </a:r>
+            <a:r>
+              <a:rPr lang="en-US" sz="1200" dirty="0"/>
+              <a:t> Geolocation, Orientation, and Bounds proposal.</a:t>
+            </a:r>
+          </a:p>
+          <a:p>
+            <a:endParaRPr lang="en-US" sz="1200" dirty="0"/>
           </a:p>
         </p:txBody>
       </p:sp>
@@ -9537,6 +9810,345 @@
         </p:spPr>
         <p:txBody>
           <a:bodyPr spcFirstLastPara="1" wrap="square" lIns="91425" tIns="91425" rIns="91425" bIns="91425" anchor="b" anchorCtr="0">
+            <a:noAutofit/>
+          </a:bodyPr>
+          <a:lstStyle/>
+          <a:p>
+            <a:pPr lvl="0"/>
+            <a:r>
+              <a:rPr lang="en-US" sz="4400" dirty="0"/>
+              <a:t>Example: Khronos </a:t>
+            </a:r>
+            <a:r>
+              <a:rPr lang="en-US" sz="4400" dirty="0" err="1"/>
+              <a:t>glTF</a:t>
+            </a:r>
+            <a:r>
+              <a:rPr lang="en-US" sz="4400" dirty="0"/>
+              <a:t> 2.0</a:t>
+            </a:r>
+            <a:endParaRPr sz="4400" dirty="0">
+              <a:latin typeface="Calibri"/>
+              <a:ea typeface="Calibri"/>
+              <a:cs typeface="Calibri"/>
+              <a:sym typeface="Calibri"/>
+            </a:endParaRPr>
+          </a:p>
+        </p:txBody>
+      </p:sp>
+      <p:sp>
+        <p:nvSpPr>
+          <p:cNvPr id="3" name="Subtitle 2">
+            <a:extLst>
+              <a:ext uri="{FF2B5EF4-FFF2-40B4-BE49-F238E27FC236}">
+                <a16:creationId xmlns:a16="http://schemas.microsoft.com/office/drawing/2014/main" id="{7553426E-95F7-5C82-01C7-6393558F86FB}"/>
+              </a:ext>
+            </a:extLst>
+          </p:cNvPr>
+          <p:cNvSpPr>
+            <a:spLocks noGrp="1"/>
+          </p:cNvSpPr>
+          <p:nvPr>
+            <p:ph type="subTitle" idx="1"/>
+          </p:nvPr>
+        </p:nvSpPr>
+        <p:spPr>
+          <a:xfrm>
+            <a:off x="463550" y="1633538"/>
+            <a:ext cx="8223250" cy="2938461"/>
+          </a:xfrm>
+        </p:spPr>
+        <p:txBody>
+          <a:bodyPr>
+            <a:normAutofit/>
+          </a:bodyPr>
+          <a:lstStyle/>
+          <a:p>
+            <a:pPr indent="0" algn="l"/>
+            <a:r>
+              <a:rPr lang="en-US" sz="2000" dirty="0"/>
+              <a:t>An OGC </a:t>
+            </a:r>
+            <a:r>
+              <a:rPr lang="en-US" sz="2000" dirty="0" err="1"/>
+              <a:t>GeoPose</a:t>
+            </a:r>
+            <a:r>
+              <a:rPr lang="en-US" sz="2000" dirty="0"/>
+              <a:t> 1.0 Basic </a:t>
+            </a:r>
+            <a:r>
+              <a:rPr lang="en-US" sz="2000" dirty="0" err="1"/>
+              <a:t>GeoPose</a:t>
+            </a:r>
+            <a:r>
+              <a:rPr lang="en-US" sz="2000" dirty="0"/>
+              <a:t> can geolocate and orient elements of the </a:t>
+            </a:r>
+            <a:r>
+              <a:rPr lang="en-US" sz="2000" dirty="0" err="1"/>
+              <a:t>glTF</a:t>
+            </a:r>
+            <a:r>
+              <a:rPr lang="en-US" sz="2000" dirty="0"/>
+              <a:t> </a:t>
+            </a:r>
+            <a:r>
+              <a:rPr lang="en-US" sz="2000" dirty="0" err="1"/>
+              <a:t>scenegraph</a:t>
+            </a:r>
+            <a:r>
+              <a:rPr lang="en-US" sz="2000" dirty="0"/>
+              <a:t>. The most basic element is the Scene and </a:t>
+            </a:r>
+            <a:r>
+              <a:rPr lang="en-US" sz="2000" dirty="0" err="1"/>
+              <a:t>glTF</a:t>
+            </a:r>
+            <a:r>
+              <a:rPr lang="en-US" sz="2000" dirty="0"/>
+              <a:t> has an extension mechanism that enables definition of a standard way to do this.</a:t>
+            </a:r>
+          </a:p>
+        </p:txBody>
+      </p:sp>
+    </p:spTree>
+    <p:extLst>
+      <p:ext uri="{BB962C8B-B14F-4D97-AF65-F5344CB8AC3E}">
+        <p14:creationId xmlns:p14="http://schemas.microsoft.com/office/powerpoint/2010/main" val="932774525"/>
+      </p:ext>
+    </p:extLst>
+  </p:cSld>
+  <p:clrMapOvr>
+    <a:masterClrMapping/>
+  </p:clrMapOvr>
+</p:sld>
+</file>
+
+<file path=ppt/slides/slide6.xml><?xml version="1.0" encoding="utf-8"?>
+<p:sld xmlns:a="http://schemas.openxmlformats.org/drawingml/2006/main" xmlns:r="http://schemas.openxmlformats.org/officeDocument/2006/relationships" xmlns:p="http://schemas.openxmlformats.org/presentationml/2006/main">
+  <p:cSld>
+    <p:spTree>
+      <p:nvGrpSpPr>
+        <p:cNvPr id="1" name="Shape 74">
+          <a:extLst>
+            <a:ext uri="{FF2B5EF4-FFF2-40B4-BE49-F238E27FC236}">
+              <a16:creationId xmlns:a16="http://schemas.microsoft.com/office/drawing/2014/main" id="{276D291F-F8B0-C377-8094-D19663F8FB68}"/>
+            </a:ext>
+          </a:extLst>
+        </p:cNvPr>
+        <p:cNvGrpSpPr/>
+        <p:nvPr/>
+      </p:nvGrpSpPr>
+      <p:grpSpPr>
+        <a:xfrm>
+          <a:off x="0" y="0"/>
+          <a:ext cx="0" cy="0"/>
+          <a:chOff x="0" y="0"/>
+          <a:chExt cx="0" cy="0"/>
+        </a:xfrm>
+      </p:grpSpPr>
+      <p:sp>
+        <p:nvSpPr>
+          <p:cNvPr id="75" name="Google Shape;75;p15">
+            <a:extLst>
+              <a:ext uri="{FF2B5EF4-FFF2-40B4-BE49-F238E27FC236}">
+                <a16:creationId xmlns:a16="http://schemas.microsoft.com/office/drawing/2014/main" id="{2DCD2E5F-A7FF-209F-B39D-240C99F0441E}"/>
+              </a:ext>
+            </a:extLst>
+          </p:cNvPr>
+          <p:cNvSpPr txBox="1">
+            <a:spLocks noGrp="1"/>
+          </p:cNvSpPr>
+          <p:nvPr>
+            <p:ph type="ctrTitle"/>
+          </p:nvPr>
+        </p:nvSpPr>
+        <p:spPr>
+          <a:xfrm>
+            <a:off x="311700" y="744575"/>
+            <a:ext cx="8520600" cy="740700"/>
+          </a:xfrm>
+          <a:prstGeom prst="rect">
+            <a:avLst/>
+          </a:prstGeom>
+        </p:spPr>
+        <p:txBody>
+          <a:bodyPr spcFirstLastPara="1" wrap="square" lIns="91425" tIns="91425" rIns="91425" bIns="91425" anchor="b" anchorCtr="0">
+            <a:noAutofit/>
+          </a:bodyPr>
+          <a:lstStyle/>
+          <a:p>
+            <a:pPr lvl="0"/>
+            <a:r>
+              <a:rPr lang="en-US" sz="4400" dirty="0"/>
+              <a:t>Example: Khronos </a:t>
+            </a:r>
+            <a:r>
+              <a:rPr lang="en-US" sz="4400" dirty="0" err="1"/>
+              <a:t>glTF</a:t>
+            </a:r>
+            <a:r>
+              <a:rPr lang="en-US" sz="4400" dirty="0"/>
+              <a:t> Geolocation, Orientation, and Bounds proposal</a:t>
+            </a:r>
+            <a:endParaRPr sz="4400" dirty="0">
+              <a:latin typeface="Calibri"/>
+              <a:ea typeface="Calibri"/>
+              <a:cs typeface="Calibri"/>
+              <a:sym typeface="Calibri"/>
+            </a:endParaRPr>
+          </a:p>
+        </p:txBody>
+      </p:sp>
+      <p:sp>
+        <p:nvSpPr>
+          <p:cNvPr id="3" name="Subtitle 2">
+            <a:extLst>
+              <a:ext uri="{FF2B5EF4-FFF2-40B4-BE49-F238E27FC236}">
+                <a16:creationId xmlns:a16="http://schemas.microsoft.com/office/drawing/2014/main" id="{1E690707-FA0F-F50C-48B7-1041B637BB16}"/>
+              </a:ext>
+            </a:extLst>
+          </p:cNvPr>
+          <p:cNvSpPr>
+            <a:spLocks noGrp="1"/>
+          </p:cNvSpPr>
+          <p:nvPr>
+            <p:ph type="subTitle" idx="1"/>
+          </p:nvPr>
+        </p:nvSpPr>
+        <p:spPr/>
+        <p:txBody>
+          <a:bodyPr/>
+          <a:lstStyle/>
+          <a:p>
+            <a:endParaRPr lang="en-US" dirty="0"/>
+          </a:p>
+        </p:txBody>
+      </p:sp>
+      <p:pic>
+        <p:nvPicPr>
+          <p:cNvPr id="4" name="Picture 3">
+            <a:extLst>
+              <a:ext uri="{FF2B5EF4-FFF2-40B4-BE49-F238E27FC236}">
+                <a16:creationId xmlns:a16="http://schemas.microsoft.com/office/drawing/2014/main" id="{0D0E53B7-5FBF-F7ED-F13F-F3A1AEA546BC}"/>
+              </a:ext>
+            </a:extLst>
+          </p:cNvPr>
+          <p:cNvPicPr>
+            <a:picLocks noChangeAspect="1"/>
+          </p:cNvPicPr>
+          <p:nvPr/>
+        </p:nvPicPr>
+        <p:blipFill>
+          <a:blip r:embed="rId3"/>
+          <a:stretch>
+            <a:fillRect/>
+          </a:stretch>
+        </p:blipFill>
+        <p:spPr>
+          <a:xfrm>
+            <a:off x="1174236" y="1574273"/>
+            <a:ext cx="2842506" cy="3162574"/>
+          </a:xfrm>
+          <a:prstGeom prst="rect">
+            <a:avLst/>
+          </a:prstGeom>
+        </p:spPr>
+      </p:pic>
+      <p:pic>
+        <p:nvPicPr>
+          <p:cNvPr id="8" name="Picture 7">
+            <a:extLst>
+              <a:ext uri="{FF2B5EF4-FFF2-40B4-BE49-F238E27FC236}">
+                <a16:creationId xmlns:a16="http://schemas.microsoft.com/office/drawing/2014/main" id="{A9B09CDD-9CE3-29D0-28E6-19AA9224CC4C}"/>
+              </a:ext>
+            </a:extLst>
+          </p:cNvPr>
+          <p:cNvPicPr>
+            <a:picLocks noChangeAspect="1"/>
+          </p:cNvPicPr>
+          <p:nvPr/>
+        </p:nvPicPr>
+        <p:blipFill>
+          <a:blip r:embed="rId4"/>
+          <a:stretch>
+            <a:fillRect/>
+          </a:stretch>
+        </p:blipFill>
+        <p:spPr>
+          <a:xfrm>
+            <a:off x="4206118" y="1876486"/>
+            <a:ext cx="2804403" cy="2522439"/>
+          </a:xfrm>
+          <a:prstGeom prst="rect">
+            <a:avLst/>
+          </a:prstGeom>
+        </p:spPr>
+      </p:pic>
+    </p:spTree>
+    <p:extLst>
+      <p:ext uri="{BB962C8B-B14F-4D97-AF65-F5344CB8AC3E}">
+        <p14:creationId xmlns:p14="http://schemas.microsoft.com/office/powerpoint/2010/main" val="990501191"/>
+      </p:ext>
+    </p:extLst>
+  </p:cSld>
+  <p:clrMapOvr>
+    <a:masterClrMapping/>
+  </p:clrMapOvr>
+</p:sld>
+</file>
+
+<file path=ppt/slides/slide7.xml><?xml version="1.0" encoding="utf-8"?>
+<p:sld xmlns:a="http://schemas.openxmlformats.org/drawingml/2006/main" xmlns:r="http://schemas.openxmlformats.org/officeDocument/2006/relationships" xmlns:p="http://schemas.openxmlformats.org/presentationml/2006/main">
+  <p:cSld>
+    <p:spTree>
+      <p:nvGrpSpPr>
+        <p:cNvPr id="1" name="Shape 74">
+          <a:extLst>
+            <a:ext uri="{FF2B5EF4-FFF2-40B4-BE49-F238E27FC236}">
+              <a16:creationId xmlns:a16="http://schemas.microsoft.com/office/drawing/2014/main" id="{E4889662-CD83-CBEF-E1ED-0DCCCB6831D3}"/>
+            </a:ext>
+          </a:extLst>
+        </p:cNvPr>
+        <p:cNvGrpSpPr/>
+        <p:nvPr/>
+      </p:nvGrpSpPr>
+      <p:grpSpPr>
+        <a:xfrm>
+          <a:off x="0" y="0"/>
+          <a:ext cx="0" cy="0"/>
+          <a:chOff x="0" y="0"/>
+          <a:chExt cx="0" cy="0"/>
+        </a:xfrm>
+      </p:grpSpPr>
+      <p:sp>
+        <p:nvSpPr>
+          <p:cNvPr id="75" name="Google Shape;75;p15">
+            <a:extLst>
+              <a:ext uri="{FF2B5EF4-FFF2-40B4-BE49-F238E27FC236}">
+                <a16:creationId xmlns:a16="http://schemas.microsoft.com/office/drawing/2014/main" id="{74E835E0-CA95-F9D1-016F-2FC64E717900}"/>
+              </a:ext>
+            </a:extLst>
+          </p:cNvPr>
+          <p:cNvSpPr txBox="1">
+            <a:spLocks noGrp="1"/>
+          </p:cNvSpPr>
+          <p:nvPr>
+            <p:ph type="ctrTitle"/>
+          </p:nvPr>
+        </p:nvSpPr>
+        <p:spPr>
+          <a:xfrm>
+            <a:off x="311700" y="744575"/>
+            <a:ext cx="8520600" cy="740700"/>
+          </a:xfrm>
+          <a:prstGeom prst="rect">
+            <a:avLst/>
+          </a:prstGeom>
+        </p:spPr>
+        <p:txBody>
+          <a:bodyPr spcFirstLastPara="1" wrap="square" lIns="91425" tIns="91425" rIns="91425" bIns="91425" anchor="b" anchorCtr="0">
             <a:normAutofit fontScale="90000"/>
           </a:bodyPr>
           <a:lstStyle/>
@@ -9582,7 +10194,7 @@
           <p:cNvPr id="3" name="Subtitle 2">
             <a:extLst>
               <a:ext uri="{FF2B5EF4-FFF2-40B4-BE49-F238E27FC236}">
-                <a16:creationId xmlns:a16="http://schemas.microsoft.com/office/drawing/2014/main" id="{7553426E-95F7-5C82-01C7-6393558F86FB}"/>
+                <a16:creationId xmlns:a16="http://schemas.microsoft.com/office/drawing/2014/main" id="{78F4114B-4728-A46E-FC0B-DF63C82986F7}"/>
               </a:ext>
             </a:extLst>
           </p:cNvPr>
@@ -9605,7 +10217,7 @@
     </p:spTree>
     <p:extLst>
       <p:ext uri="{BB962C8B-B14F-4D97-AF65-F5344CB8AC3E}">
-        <p14:creationId xmlns:p14="http://schemas.microsoft.com/office/powerpoint/2010/main" val="932774525"/>
+        <p14:creationId xmlns:p14="http://schemas.microsoft.com/office/powerpoint/2010/main" val="803212188"/>
       </p:ext>
     </p:extLst>
   </p:cSld>
@@ -9615,7 +10227,7 @@
 </p:sld>
 </file>
 
-<file path=ppt/slides/slide6.xml><?xml version="1.0" encoding="utf-8"?>
+<file path=ppt/slides/slide8.xml><?xml version="1.0" encoding="utf-8"?>
 <p:sld xmlns:a="http://schemas.openxmlformats.org/drawingml/2006/main" xmlns:r="http://schemas.openxmlformats.org/officeDocument/2006/relationships" xmlns:p="http://schemas.openxmlformats.org/presentationml/2006/main">
   <p:cSld>
     <p:spTree>
@@ -9623,7 +10235,7 @@
         <p:cNvPr id="1" name="Shape 74">
           <a:extLst>
             <a:ext uri="{FF2B5EF4-FFF2-40B4-BE49-F238E27FC236}">
-              <a16:creationId xmlns:a16="http://schemas.microsoft.com/office/drawing/2014/main" id="{E4889662-CD83-CBEF-E1ED-0DCCCB6831D3}"/>
+              <a16:creationId xmlns:a16="http://schemas.microsoft.com/office/drawing/2014/main" id="{8A8E3DA5-B668-FC2B-F492-EB8EC4C9D071}"/>
             </a:ext>
           </a:extLst>
         </p:cNvPr>
@@ -9643,7 +10255,7 @@
           <p:cNvPr id="75" name="Google Shape;75;p15">
             <a:extLst>
               <a:ext uri="{FF2B5EF4-FFF2-40B4-BE49-F238E27FC236}">
-                <a16:creationId xmlns:a16="http://schemas.microsoft.com/office/drawing/2014/main" id="{74E835E0-CA95-F9D1-016F-2FC64E717900}"/>
+                <a16:creationId xmlns:a16="http://schemas.microsoft.com/office/drawing/2014/main" id="{17CF393A-F088-032F-E78B-1627663A0400}"/>
               </a:ext>
             </a:extLst>
           </p:cNvPr>
@@ -9710,7 +10322,7 @@
           <p:cNvPr id="3" name="Subtitle 2">
             <a:extLst>
               <a:ext uri="{FF2B5EF4-FFF2-40B4-BE49-F238E27FC236}">
-                <a16:creationId xmlns:a16="http://schemas.microsoft.com/office/drawing/2014/main" id="{78F4114B-4728-A46E-FC0B-DF63C82986F7}"/>
+                <a16:creationId xmlns:a16="http://schemas.microsoft.com/office/drawing/2014/main" id="{861BD6E5-A984-B94D-6215-2F81D39D14A5}"/>
               </a:ext>
             </a:extLst>
           </p:cNvPr>
@@ -9733,7 +10345,7 @@
     </p:spTree>
     <p:extLst>
       <p:ext uri="{BB962C8B-B14F-4D97-AF65-F5344CB8AC3E}">
-        <p14:creationId xmlns:p14="http://schemas.microsoft.com/office/powerpoint/2010/main" val="803212188"/>
+        <p14:creationId xmlns:p14="http://schemas.microsoft.com/office/powerpoint/2010/main" val="2607580681"/>
       </p:ext>
     </p:extLst>
   </p:cSld>
@@ -9743,7 +10355,7 @@
 </p:sld>
 </file>
 
-<file path=ppt/slides/slide7.xml><?xml version="1.0" encoding="utf-8"?>
+<file path=ppt/slides/slide9.xml><?xml version="1.0" encoding="utf-8"?>
 <p:sld xmlns:a="http://schemas.openxmlformats.org/drawingml/2006/main" xmlns:r="http://schemas.openxmlformats.org/officeDocument/2006/relationships" xmlns:p="http://schemas.openxmlformats.org/presentationml/2006/main">
   <p:cSld>
     <p:spTree>
@@ -9751,7 +10363,7 @@
         <p:cNvPr id="1" name="Shape 74">
           <a:extLst>
             <a:ext uri="{FF2B5EF4-FFF2-40B4-BE49-F238E27FC236}">
-              <a16:creationId xmlns:a16="http://schemas.microsoft.com/office/drawing/2014/main" id="{8A8E3DA5-B668-FC2B-F492-EB8EC4C9D071}"/>
+              <a16:creationId xmlns:a16="http://schemas.microsoft.com/office/drawing/2014/main" id="{975AACE5-DD47-649C-B4C4-77D87DB84295}"/>
             </a:ext>
           </a:extLst>
         </p:cNvPr>
@@ -9771,7 +10383,7 @@
           <p:cNvPr id="75" name="Google Shape;75;p15">
             <a:extLst>
               <a:ext uri="{FF2B5EF4-FFF2-40B4-BE49-F238E27FC236}">
-                <a16:creationId xmlns:a16="http://schemas.microsoft.com/office/drawing/2014/main" id="{17CF393A-F088-032F-E78B-1627663A0400}"/>
+                <a16:creationId xmlns:a16="http://schemas.microsoft.com/office/drawing/2014/main" id="{71DB69DF-4227-13C5-E397-0C1C2688016E}"/>
               </a:ext>
             </a:extLst>
           </p:cNvPr>
@@ -9838,134 +10450,6 @@
           <p:cNvPr id="3" name="Subtitle 2">
             <a:extLst>
               <a:ext uri="{FF2B5EF4-FFF2-40B4-BE49-F238E27FC236}">
-                <a16:creationId xmlns:a16="http://schemas.microsoft.com/office/drawing/2014/main" id="{861BD6E5-A984-B94D-6215-2F81D39D14A5}"/>
-              </a:ext>
-            </a:extLst>
-          </p:cNvPr>
-          <p:cNvSpPr>
-            <a:spLocks noGrp="1"/>
-          </p:cNvSpPr>
-          <p:nvPr>
-            <p:ph type="subTitle" idx="1"/>
-          </p:nvPr>
-        </p:nvSpPr>
-        <p:spPr/>
-        <p:txBody>
-          <a:bodyPr/>
-          <a:lstStyle/>
-          <a:p>
-            <a:endParaRPr lang="en-US"/>
-          </a:p>
-        </p:txBody>
-      </p:sp>
-    </p:spTree>
-    <p:extLst>
-      <p:ext uri="{BB962C8B-B14F-4D97-AF65-F5344CB8AC3E}">
-        <p14:creationId xmlns:p14="http://schemas.microsoft.com/office/powerpoint/2010/main" val="2607580681"/>
-      </p:ext>
-    </p:extLst>
-  </p:cSld>
-  <p:clrMapOvr>
-    <a:masterClrMapping/>
-  </p:clrMapOvr>
-</p:sld>
-</file>
-
-<file path=ppt/slides/slide8.xml><?xml version="1.0" encoding="utf-8"?>
-<p:sld xmlns:a="http://schemas.openxmlformats.org/drawingml/2006/main" xmlns:r="http://schemas.openxmlformats.org/officeDocument/2006/relationships" xmlns:p="http://schemas.openxmlformats.org/presentationml/2006/main">
-  <p:cSld>
-    <p:spTree>
-      <p:nvGrpSpPr>
-        <p:cNvPr id="1" name="Shape 74">
-          <a:extLst>
-            <a:ext uri="{FF2B5EF4-FFF2-40B4-BE49-F238E27FC236}">
-              <a16:creationId xmlns:a16="http://schemas.microsoft.com/office/drawing/2014/main" id="{975AACE5-DD47-649C-B4C4-77D87DB84295}"/>
-            </a:ext>
-          </a:extLst>
-        </p:cNvPr>
-        <p:cNvGrpSpPr/>
-        <p:nvPr/>
-      </p:nvGrpSpPr>
-      <p:grpSpPr>
-        <a:xfrm>
-          <a:off x="0" y="0"/>
-          <a:ext cx="0" cy="0"/>
-          <a:chOff x="0" y="0"/>
-          <a:chExt cx="0" cy="0"/>
-        </a:xfrm>
-      </p:grpSpPr>
-      <p:sp>
-        <p:nvSpPr>
-          <p:cNvPr id="75" name="Google Shape;75;p15">
-            <a:extLst>
-              <a:ext uri="{FF2B5EF4-FFF2-40B4-BE49-F238E27FC236}">
-                <a16:creationId xmlns:a16="http://schemas.microsoft.com/office/drawing/2014/main" id="{71DB69DF-4227-13C5-E397-0C1C2688016E}"/>
-              </a:ext>
-            </a:extLst>
-          </p:cNvPr>
-          <p:cNvSpPr txBox="1">
-            <a:spLocks noGrp="1"/>
-          </p:cNvSpPr>
-          <p:nvPr>
-            <p:ph type="ctrTitle"/>
-          </p:nvPr>
-        </p:nvSpPr>
-        <p:spPr>
-          <a:xfrm>
-            <a:off x="311700" y="744575"/>
-            <a:ext cx="8520600" cy="740700"/>
-          </a:xfrm>
-          <a:prstGeom prst="rect">
-            <a:avLst/>
-          </a:prstGeom>
-        </p:spPr>
-        <p:txBody>
-          <a:bodyPr spcFirstLastPara="1" wrap="square" lIns="91425" tIns="91425" rIns="91425" bIns="91425" anchor="b" anchorCtr="0">
-            <a:normAutofit fontScale="90000"/>
-          </a:bodyPr>
-          <a:lstStyle/>
-          <a:p>
-            <a:pPr marL="0" lvl="0" indent="0" algn="ctr" rtl="0">
-              <a:spcBef>
-                <a:spcPts val="0"/>
-              </a:spcBef>
-              <a:spcAft>
-                <a:spcPts val="0"/>
-              </a:spcAft>
-              <a:buNone/>
-            </a:pPr>
-            <a:r>
-              <a:rPr lang="en-US" dirty="0">
-                <a:latin typeface="Calibri"/>
-                <a:ea typeface="Calibri"/>
-                <a:cs typeface="Calibri"/>
-                <a:sym typeface="Calibri"/>
-              </a:rPr>
-              <a:t>Standards</a:t>
-            </a:r>
-            <a:r>
-              <a:rPr lang="en" dirty="0">
-                <a:latin typeface="Calibri"/>
-                <a:ea typeface="Calibri"/>
-                <a:cs typeface="Calibri"/>
-                <a:sym typeface="Calibri"/>
-              </a:rPr>
-              <a:t>-01</a:t>
-            </a:r>
-            <a:endParaRPr dirty="0">
-              <a:latin typeface="Calibri"/>
-              <a:ea typeface="Calibri"/>
-              <a:cs typeface="Calibri"/>
-              <a:sym typeface="Calibri"/>
-            </a:endParaRPr>
-          </a:p>
-        </p:txBody>
-      </p:sp>
-      <p:sp>
-        <p:nvSpPr>
-          <p:cNvPr id="3" name="Subtitle 2">
-            <a:extLst>
-              <a:ext uri="{FF2B5EF4-FFF2-40B4-BE49-F238E27FC236}">
                 <a16:creationId xmlns:a16="http://schemas.microsoft.com/office/drawing/2014/main" id="{92276DF3-A423-C041-1F51-87C11F512CFC}"/>
               </a:ext>
             </a:extLst>
@@ -9990,134 +10474,6 @@
     <p:extLst>
       <p:ext uri="{BB962C8B-B14F-4D97-AF65-F5344CB8AC3E}">
         <p14:creationId xmlns:p14="http://schemas.microsoft.com/office/powerpoint/2010/main" val="3372962042"/>
-      </p:ext>
-    </p:extLst>
-  </p:cSld>
-  <p:clrMapOvr>
-    <a:masterClrMapping/>
-  </p:clrMapOvr>
-</p:sld>
-</file>
-
-<file path=ppt/slides/slide9.xml><?xml version="1.0" encoding="utf-8"?>
-<p:sld xmlns:a="http://schemas.openxmlformats.org/drawingml/2006/main" xmlns:r="http://schemas.openxmlformats.org/officeDocument/2006/relationships" xmlns:p="http://schemas.openxmlformats.org/presentationml/2006/main">
-  <p:cSld>
-    <p:spTree>
-      <p:nvGrpSpPr>
-        <p:cNvPr id="1" name="Shape 74">
-          <a:extLst>
-            <a:ext uri="{FF2B5EF4-FFF2-40B4-BE49-F238E27FC236}">
-              <a16:creationId xmlns:a16="http://schemas.microsoft.com/office/drawing/2014/main" id="{D40C9DFB-041B-1A6A-25B4-D8E52B5A3D0F}"/>
-            </a:ext>
-          </a:extLst>
-        </p:cNvPr>
-        <p:cNvGrpSpPr/>
-        <p:nvPr/>
-      </p:nvGrpSpPr>
-      <p:grpSpPr>
-        <a:xfrm>
-          <a:off x="0" y="0"/>
-          <a:ext cx="0" cy="0"/>
-          <a:chOff x="0" y="0"/>
-          <a:chExt cx="0" cy="0"/>
-        </a:xfrm>
-      </p:grpSpPr>
-      <p:sp>
-        <p:nvSpPr>
-          <p:cNvPr id="75" name="Google Shape;75;p15">
-            <a:extLst>
-              <a:ext uri="{FF2B5EF4-FFF2-40B4-BE49-F238E27FC236}">
-                <a16:creationId xmlns:a16="http://schemas.microsoft.com/office/drawing/2014/main" id="{7C5241A9-E736-9972-289D-6721844EE792}"/>
-              </a:ext>
-            </a:extLst>
-          </p:cNvPr>
-          <p:cNvSpPr txBox="1">
-            <a:spLocks noGrp="1"/>
-          </p:cNvSpPr>
-          <p:nvPr>
-            <p:ph type="ctrTitle"/>
-          </p:nvPr>
-        </p:nvSpPr>
-        <p:spPr>
-          <a:xfrm>
-            <a:off x="311700" y="744575"/>
-            <a:ext cx="8520600" cy="740700"/>
-          </a:xfrm>
-          <a:prstGeom prst="rect">
-            <a:avLst/>
-          </a:prstGeom>
-        </p:spPr>
-        <p:txBody>
-          <a:bodyPr spcFirstLastPara="1" wrap="square" lIns="91425" tIns="91425" rIns="91425" bIns="91425" anchor="b" anchorCtr="0">
-            <a:normAutofit fontScale="90000"/>
-          </a:bodyPr>
-          <a:lstStyle/>
-          <a:p>
-            <a:pPr marL="0" lvl="0" indent="0" algn="ctr" rtl="0">
-              <a:spcBef>
-                <a:spcPts val="0"/>
-              </a:spcBef>
-              <a:spcAft>
-                <a:spcPts val="0"/>
-              </a:spcAft>
-              <a:buNone/>
-            </a:pPr>
-            <a:r>
-              <a:rPr lang="en-US" dirty="0">
-                <a:latin typeface="Calibri"/>
-                <a:ea typeface="Calibri"/>
-                <a:cs typeface="Calibri"/>
-                <a:sym typeface="Calibri"/>
-              </a:rPr>
-              <a:t>Standards</a:t>
-            </a:r>
-            <a:r>
-              <a:rPr lang="en" dirty="0">
-                <a:latin typeface="Calibri"/>
-                <a:ea typeface="Calibri"/>
-                <a:cs typeface="Calibri"/>
-                <a:sym typeface="Calibri"/>
-              </a:rPr>
-              <a:t>-01</a:t>
-            </a:r>
-            <a:endParaRPr dirty="0">
-              <a:latin typeface="Calibri"/>
-              <a:ea typeface="Calibri"/>
-              <a:cs typeface="Calibri"/>
-              <a:sym typeface="Calibri"/>
-            </a:endParaRPr>
-          </a:p>
-        </p:txBody>
-      </p:sp>
-      <p:sp>
-        <p:nvSpPr>
-          <p:cNvPr id="3" name="Subtitle 2">
-            <a:extLst>
-              <a:ext uri="{FF2B5EF4-FFF2-40B4-BE49-F238E27FC236}">
-                <a16:creationId xmlns:a16="http://schemas.microsoft.com/office/drawing/2014/main" id="{8CCA28EA-3FF8-967F-F08A-E954C69E5F74}"/>
-              </a:ext>
-            </a:extLst>
-          </p:cNvPr>
-          <p:cNvSpPr>
-            <a:spLocks noGrp="1"/>
-          </p:cNvSpPr>
-          <p:nvPr>
-            <p:ph type="subTitle" idx="1"/>
-          </p:nvPr>
-        </p:nvSpPr>
-        <p:spPr/>
-        <p:txBody>
-          <a:bodyPr/>
-          <a:lstStyle/>
-          <a:p>
-            <a:endParaRPr lang="en-US"/>
-          </a:p>
-        </p:txBody>
-      </p:sp>
-    </p:spTree>
-    <p:extLst>
-      <p:ext uri="{BB962C8B-B14F-4D97-AF65-F5344CB8AC3E}">
-        <p14:creationId xmlns:p14="http://schemas.microsoft.com/office/powerpoint/2010/main" val="1067124632"/>
       </p:ext>
     </p:extLst>
   </p:cSld>
